--- a/cheat_sheet_DE.pptx
+++ b/cheat_sheet_DE.pptx
@@ -200,7 +200,7 @@
           <a:p>
             <a:fld id="{C7D59642-6866-9F43-94BF-BB911DC3BFE4}" type="datetimeFigureOut">
               <a:rPr lang="de-DE" smtClean="0"/>
-              <a:t>03.04.25</a:t>
+              <a:t>21.05.26</a:t>
             </a:fld>
             <a:endParaRPr lang="de-DE"/>
           </a:p>
@@ -687,7 +687,7 @@
           <a:p>
             <a:fld id="{C764DE79-268F-4C1A-8933-263129D2AF90}" type="datetimeFigureOut">
               <a:rPr lang="en-US" dirty="0"/>
-              <a:t>4/3/25</a:t>
+              <a:t>5/21/26</a:t>
             </a:fld>
             <a:endParaRPr lang="en-US" dirty="0"/>
           </a:p>
@@ -857,7 +857,7 @@
           <a:p>
             <a:fld id="{C764DE79-268F-4C1A-8933-263129D2AF90}" type="datetimeFigureOut">
               <a:rPr lang="en-US" dirty="0"/>
-              <a:t>4/3/25</a:t>
+              <a:t>5/21/26</a:t>
             </a:fld>
             <a:endParaRPr lang="en-US" dirty="0"/>
           </a:p>
@@ -1037,7 +1037,7 @@
           <a:p>
             <a:fld id="{C764DE79-268F-4C1A-8933-263129D2AF90}" type="datetimeFigureOut">
               <a:rPr lang="en-US" dirty="0"/>
-              <a:t>4/3/25</a:t>
+              <a:t>5/21/26</a:t>
             </a:fld>
             <a:endParaRPr lang="en-US" dirty="0"/>
           </a:p>
@@ -1207,7 +1207,7 @@
           <a:p>
             <a:fld id="{C764DE79-268F-4C1A-8933-263129D2AF90}" type="datetimeFigureOut">
               <a:rPr lang="en-US" dirty="0"/>
-              <a:t>4/3/25</a:t>
+              <a:t>5/21/26</a:t>
             </a:fld>
             <a:endParaRPr lang="en-US" dirty="0"/>
           </a:p>
@@ -1453,7 +1453,7 @@
           <a:p>
             <a:fld id="{C764DE79-268F-4C1A-8933-263129D2AF90}" type="datetimeFigureOut">
               <a:rPr lang="en-US" dirty="0"/>
-              <a:t>4/3/25</a:t>
+              <a:t>5/21/26</a:t>
             </a:fld>
             <a:endParaRPr lang="en-US" dirty="0"/>
           </a:p>
@@ -1685,7 +1685,7 @@
           <a:p>
             <a:fld id="{C764DE79-268F-4C1A-8933-263129D2AF90}" type="datetimeFigureOut">
               <a:rPr lang="en-US" dirty="0"/>
-              <a:t>4/3/25</a:t>
+              <a:t>5/21/26</a:t>
             </a:fld>
             <a:endParaRPr lang="en-US" dirty="0"/>
           </a:p>
@@ -2052,7 +2052,7 @@
           <a:p>
             <a:fld id="{C764DE79-268F-4C1A-8933-263129D2AF90}" type="datetimeFigureOut">
               <a:rPr lang="en-US" dirty="0"/>
-              <a:t>4/3/25</a:t>
+              <a:t>5/21/26</a:t>
             </a:fld>
             <a:endParaRPr lang="en-US" dirty="0"/>
           </a:p>
@@ -2170,7 +2170,7 @@
           <a:p>
             <a:fld id="{C764DE79-268F-4C1A-8933-263129D2AF90}" type="datetimeFigureOut">
               <a:rPr lang="en-US" dirty="0"/>
-              <a:t>4/3/25</a:t>
+              <a:t>5/21/26</a:t>
             </a:fld>
             <a:endParaRPr lang="en-US" dirty="0"/>
           </a:p>
@@ -2265,7 +2265,7 @@
           <a:p>
             <a:fld id="{C764DE79-268F-4C1A-8933-263129D2AF90}" type="datetimeFigureOut">
               <a:rPr lang="en-US" dirty="0"/>
-              <a:t>4/3/25</a:t>
+              <a:t>5/21/26</a:t>
             </a:fld>
             <a:endParaRPr lang="en-US" dirty="0"/>
           </a:p>
@@ -2542,7 +2542,7 @@
           <a:p>
             <a:fld id="{C764DE79-268F-4C1A-8933-263129D2AF90}" type="datetimeFigureOut">
               <a:rPr lang="en-US" dirty="0"/>
-              <a:t>4/3/25</a:t>
+              <a:t>5/21/26</a:t>
             </a:fld>
             <a:endParaRPr lang="en-US" dirty="0"/>
           </a:p>
@@ -2799,7 +2799,7 @@
           <a:p>
             <a:fld id="{C764DE79-268F-4C1A-8933-263129D2AF90}" type="datetimeFigureOut">
               <a:rPr lang="en-US" dirty="0"/>
-              <a:t>4/3/25</a:t>
+              <a:t>5/21/26</a:t>
             </a:fld>
             <a:endParaRPr lang="en-US" dirty="0"/>
           </a:p>
@@ -3012,7 +3012,7 @@
           <a:p>
             <a:fld id="{C764DE79-268F-4C1A-8933-263129D2AF90}" type="datetimeFigureOut">
               <a:rPr lang="en-US" dirty="0"/>
-              <a:t>4/3/25</a:t>
+              <a:t>5/21/26</a:t>
             </a:fld>
             <a:endParaRPr lang="en-US" dirty="0"/>
           </a:p>
@@ -5102,7 +5102,7 @@
                 <a:ea typeface="MesloLGSDZ Nerd Font" panose="020B0609030804020204" pitchFamily="49" charset="0"/>
                 <a:cs typeface="MesloLGSDZ Nerd Font" panose="020B0609030804020204" pitchFamily="49" charset="0"/>
               </a:rPr>
-              <a:t>= KORREL.CRAMER(</a:t>
+              <a:t>= KORREL.CRAMER.TEST(</a:t>
             </a:r>
             <a:r>
               <a:rPr lang="de-DE" sz="813" dirty="0" err="1">
@@ -5173,7 +5173,7 @@
                 <a:ea typeface="MesloLGSDZ Nerd Font" panose="020B0609030804020204" pitchFamily="49" charset="0"/>
                 <a:cs typeface="MesloLGSDZ Nerd Font" panose="020B0609030804020204" pitchFamily="49" charset="0"/>
               </a:rPr>
-              <a:t>= KORREL.PEARSON(</a:t>
+              <a:t>= KORREL.PEARSON.TEST(</a:t>
             </a:r>
             <a:r>
               <a:rPr lang="de-DE" sz="813" dirty="0" err="1">
@@ -5244,78 +5244,7 @@
                 <a:ea typeface="MesloLGSDZ Nerd Font" panose="020B0609030804020204" pitchFamily="49" charset="0"/>
                 <a:cs typeface="MesloLGSDZ Nerd Font" panose="020B0609030804020204" pitchFamily="49" charset="0"/>
               </a:rPr>
-              <a:t>= KORREL.KENDAL(</a:t>
-            </a:r>
-            <a:r>
-              <a:rPr lang="de-DE" sz="813" dirty="0" err="1">
-                <a:latin typeface="MesloLGSDZ Nerd Font" panose="020B0609030804020204" pitchFamily="49" charset="0"/>
-                <a:ea typeface="MesloLGSDZ Nerd Font" panose="020B0609030804020204" pitchFamily="49" charset="0"/>
-                <a:cs typeface="MesloLGSDZ Nerd Font" panose="020B0609030804020204" pitchFamily="49" charset="0"/>
-              </a:rPr>
-              <a:t>abhV</a:t>
-            </a:r>
-            <a:r>
-              <a:rPr lang="de-DE" sz="813" dirty="0">
-                <a:latin typeface="MesloLGSDZ Nerd Font" panose="020B0609030804020204" pitchFamily="49" charset="0"/>
-                <a:ea typeface="MesloLGSDZ Nerd Font" panose="020B0609030804020204" pitchFamily="49" charset="0"/>
-                <a:cs typeface="MesloLGSDZ Nerd Font" panose="020B0609030804020204" pitchFamily="49" charset="0"/>
-              </a:rPr>
-              <a:t>; </a:t>
-            </a:r>
-            <a:r>
-              <a:rPr lang="de-DE" sz="813" dirty="0" err="1">
-                <a:latin typeface="MesloLGSDZ Nerd Font" panose="020B0609030804020204" pitchFamily="49" charset="0"/>
-                <a:ea typeface="MesloLGSDZ Nerd Font" panose="020B0609030804020204" pitchFamily="49" charset="0"/>
-                <a:cs typeface="MesloLGSDZ Nerd Font" panose="020B0609030804020204" pitchFamily="49" charset="0"/>
-              </a:rPr>
-              <a:t>unabhV</a:t>
-            </a:r>
-            <a:r>
-              <a:rPr lang="de-DE" sz="813" dirty="0">
-                <a:latin typeface="MesloLGSDZ Nerd Font" panose="020B0609030804020204" pitchFamily="49" charset="0"/>
-                <a:ea typeface="MesloLGSDZ Nerd Font" panose="020B0609030804020204" pitchFamily="49" charset="0"/>
-                <a:cs typeface="MesloLGSDZ Nerd Font" panose="020B0609030804020204" pitchFamily="49" charset="0"/>
-              </a:rPr>
-              <a:t>)</a:t>
-            </a:r>
-          </a:p>
-        </p:txBody>
-      </p:sp>
-      <p:sp>
-        <p:nvSpPr>
-          <p:cNvPr id="52" name="Textfeld 51">
-            <a:extLst>
-              <a:ext uri="{FF2B5EF4-FFF2-40B4-BE49-F238E27FC236}">
-                <a16:creationId xmlns:a16="http://schemas.microsoft.com/office/drawing/2014/main" id="{4A9B8118-D7AF-5346-BB4D-D6678B1AD056}"/>
-              </a:ext>
-            </a:extLst>
-          </p:cNvPr>
-          <p:cNvSpPr txBox="1"/>
-          <p:nvPr/>
-        </p:nvSpPr>
-        <p:spPr>
-          <a:xfrm>
-            <a:off x="3096504" y="4332208"/>
-            <a:ext cx="2719346" cy="217432"/>
-          </a:xfrm>
-          <a:prstGeom prst="rect">
-            <a:avLst/>
-          </a:prstGeom>
-          <a:noFill/>
-        </p:spPr>
-        <p:txBody>
-          <a:bodyPr wrap="square">
-            <a:spAutoFit/>
-          </a:bodyPr>
-          <a:lstStyle/>
-          <a:p>
-            <a:r>
-              <a:rPr lang="de-DE" sz="813" dirty="0">
-                <a:latin typeface="MesloLGSDZ Nerd Font" panose="020B0609030804020204" pitchFamily="49" charset="0"/>
-                <a:ea typeface="MesloLGSDZ Nerd Font" panose="020B0609030804020204" pitchFamily="49" charset="0"/>
-                <a:cs typeface="MesloLGSDZ Nerd Font" panose="020B0609030804020204" pitchFamily="49" charset="0"/>
-              </a:rPr>
-              <a:t>= KORREL(</a:t>
+              <a:t>= KORREL.KENDAL.TEST(</a:t>
             </a:r>
             <a:r>
               <a:rPr lang="de-DE" sz="813" dirty="0" err="1">
@@ -10576,7 +10505,7 @@
         <p:spPr>
           <a:xfrm>
             <a:off x="177206" y="639441"/>
-            <a:ext cx="2182009" cy="217432"/>
+            <a:ext cx="2616422" cy="217432"/>
           </a:xfrm>
           <a:prstGeom prst="rect">
             <a:avLst/>
@@ -10591,46 +10520,7 @@
           <a:p>
             <a:r>
               <a:rPr lang="de-DE" sz="813" b="1" dirty="0"/>
-              <a:t>Spalten aus der Datentabelle extrahieren</a:t>
-            </a:r>
-          </a:p>
-        </p:txBody>
-      </p:sp>
-      <p:sp>
-        <p:nvSpPr>
-          <p:cNvPr id="13" name="Textfeld 12">
-            <a:extLst>
-              <a:ext uri="{FF2B5EF4-FFF2-40B4-BE49-F238E27FC236}">
-                <a16:creationId xmlns:a16="http://schemas.microsoft.com/office/drawing/2014/main" id="{F75CADE6-3CF0-8B60-B72E-9840AFACF4DB}"/>
-              </a:ext>
-            </a:extLst>
-          </p:cNvPr>
-          <p:cNvSpPr txBox="1"/>
-          <p:nvPr/>
-        </p:nvSpPr>
-        <p:spPr>
-          <a:xfrm>
-            <a:off x="181500" y="856873"/>
-            <a:ext cx="2719346" cy="217432"/>
-          </a:xfrm>
-          <a:prstGeom prst="rect">
-            <a:avLst/>
-          </a:prstGeom>
-          <a:noFill/>
-        </p:spPr>
-        <p:txBody>
-          <a:bodyPr wrap="square">
-            <a:spAutoFit/>
-          </a:bodyPr>
-          <a:lstStyle/>
-          <a:p>
-            <a:r>
-              <a:rPr lang="de-DE" sz="813" dirty="0">
-                <a:latin typeface="MesloLGSDZ Nerd Font" panose="020B0609030804020204" pitchFamily="49" charset="0"/>
-                <a:ea typeface="MesloLGSDZ Nerd Font" panose="020B0609030804020204" pitchFamily="49" charset="0"/>
-                <a:cs typeface="MesloLGSDZ Nerd Font" panose="020B0609030804020204" pitchFamily="49" charset="0"/>
-              </a:rPr>
-              <a:t>= TABELLEN.AUSWAHL(TABNAME; SPNAMEN)</a:t>
+              <a:t>Spalten mit dem gleichen Skalenniveau extrahieren</a:t>
             </a:r>
           </a:p>
         </p:txBody>
@@ -10730,7 +10620,7 @@
         </p:nvSpPr>
         <p:spPr>
           <a:xfrm>
-            <a:off x="3455181" y="1532545"/>
+            <a:off x="3418121" y="1968127"/>
             <a:ext cx="2719346" cy="217432"/>
           </a:xfrm>
           <a:prstGeom prst="rect">
@@ -10750,7 +10640,23 @@
                 <a:ea typeface="MesloLGSDZ Nerd Font" panose="020B0609030804020204" pitchFamily="49" charset="0"/>
                 <a:cs typeface="MesloLGSDZ Nerd Font" panose="020B0609030804020204" pitchFamily="49" charset="0"/>
               </a:rPr>
-              <a:t>= ENTFERNE.FEHLER(Wertematrix)</a:t>
+              <a:t>= ENTFERNE.FEHLER(</a:t>
+            </a:r>
+            <a:r>
+              <a:rPr lang="de-DE" sz="813" dirty="0" err="1">
+                <a:latin typeface="MesloLGSDZ Nerd Font" panose="020B0609030804020204" pitchFamily="49" charset="0"/>
+                <a:ea typeface="MesloLGSDZ Nerd Font" panose="020B0609030804020204" pitchFamily="49" charset="0"/>
+                <a:cs typeface="MesloLGSDZ Nerd Font" panose="020B0609030804020204" pitchFamily="49" charset="0"/>
+              </a:rPr>
+              <a:t>extrahierte_werte</a:t>
+            </a:r>
+            <a:r>
+              <a:rPr lang="de-DE" sz="813" dirty="0">
+                <a:latin typeface="MesloLGSDZ Nerd Font" panose="020B0609030804020204" pitchFamily="49" charset="0"/>
+                <a:ea typeface="MesloLGSDZ Nerd Font" panose="020B0609030804020204" pitchFamily="49" charset="0"/>
+                <a:cs typeface="MesloLGSDZ Nerd Font" panose="020B0609030804020204" pitchFamily="49" charset="0"/>
+              </a:rPr>
+              <a:t>)</a:t>
             </a:r>
           </a:p>
         </p:txBody>
@@ -11173,8 +11079,8 @@
         </p:nvSpPr>
         <p:spPr>
           <a:xfrm>
-            <a:off x="397963" y="1915392"/>
-            <a:ext cx="2875711" cy="717825"/>
+            <a:off x="394362" y="1640857"/>
+            <a:ext cx="2875711" cy="592726"/>
           </a:xfrm>
           <a:prstGeom prst="rect">
             <a:avLst/>
@@ -11198,7 +11104,7 @@
                 <a:ea typeface="MesloLGSDZ Nerd Font" panose="020B0609030804020204" pitchFamily="49" charset="0"/>
                 <a:cs typeface="MesloLGSDZ Nerd Font" panose="020B0609030804020204" pitchFamily="49" charset="0"/>
               </a:rPr>
-              <a:t>= TABELLEN.AUSWAHL(</a:t>
+              <a:t>= UNGÜLTIGE.MARKIEREN(</a:t>
             </a:r>
           </a:p>
           <a:p>
@@ -11213,7 +11119,7 @@
                 <a:ea typeface="MesloLGSDZ Nerd Font" panose="020B0609030804020204" pitchFamily="49" charset="0"/>
                 <a:cs typeface="MesloLGSDZ Nerd Font" panose="020B0609030804020204" pitchFamily="49" charset="0"/>
               </a:rPr>
-              <a:t>    "Daten"; </a:t>
+              <a:t>    A2#;</a:t>
             </a:r>
           </a:p>
           <a:p>
@@ -11228,7 +11134,7 @@
                 <a:ea typeface="MesloLGSDZ Nerd Font" panose="020B0609030804020204" pitchFamily="49" charset="0"/>
                 <a:cs typeface="MesloLGSDZ Nerd Font" panose="020B0609030804020204" pitchFamily="49" charset="0"/>
               </a:rPr>
-              <a:t>    FILTER(Schema[Name];</a:t>
+              <a:t>    {“NA“; ““; “-999“}</a:t>
             </a:r>
           </a:p>
           <a:p>
@@ -11243,9 +11149,185 @@
                 <a:ea typeface="MesloLGSDZ Nerd Font" panose="020B0609030804020204" pitchFamily="49" charset="0"/>
                 <a:cs typeface="MesloLGSDZ Nerd Font" panose="020B0609030804020204" pitchFamily="49" charset="0"/>
               </a:rPr>
-              <a:t>           Schema[Skalierung] = "ordinal“)</a:t>
-            </a:r>
-          </a:p>
+              <a:t>)</a:t>
+            </a:r>
+          </a:p>
+        </p:txBody>
+      </p:sp>
+      <p:sp>
+        <p:nvSpPr>
+          <p:cNvPr id="42" name="Textfeld 41">
+            <a:extLst>
+              <a:ext uri="{FF2B5EF4-FFF2-40B4-BE49-F238E27FC236}">
+                <a16:creationId xmlns:a16="http://schemas.microsoft.com/office/drawing/2014/main" id="{19BAEC90-09A7-CAB4-18E5-62DCED44A5F5}"/>
+              </a:ext>
+            </a:extLst>
+          </p:cNvPr>
+          <p:cNvSpPr txBox="1"/>
+          <p:nvPr/>
+        </p:nvSpPr>
+        <p:spPr>
+          <a:xfrm>
+            <a:off x="6893027" y="4436732"/>
+            <a:ext cx="2719346" cy="217432"/>
+          </a:xfrm>
+          <a:prstGeom prst="rect">
+            <a:avLst/>
+          </a:prstGeom>
+          <a:noFill/>
+        </p:spPr>
+        <p:txBody>
+          <a:bodyPr wrap="square">
+            <a:spAutoFit/>
+          </a:bodyPr>
+          <a:lstStyle/>
+          <a:p>
+            <a:r>
+              <a:rPr lang="de-DE" sz="813" dirty="0">
+                <a:latin typeface="MesloLGSDZ Nerd Font" panose="020B0609030804020204" pitchFamily="49" charset="0"/>
+                <a:ea typeface="MesloLGSDZ Nerd Font" panose="020B0609030804020204" pitchFamily="49" charset="0"/>
+                <a:cs typeface="MesloLGSDZ Nerd Font" panose="020B0609030804020204" pitchFamily="49" charset="0"/>
+              </a:rPr>
+              <a:t>= HWIEDERHOLEN(Wert; Anzahl)</a:t>
+            </a:r>
+          </a:p>
+        </p:txBody>
+      </p:sp>
+      <p:sp>
+        <p:nvSpPr>
+          <p:cNvPr id="43" name="Textfeld 42">
+            <a:extLst>
+              <a:ext uri="{FF2B5EF4-FFF2-40B4-BE49-F238E27FC236}">
+                <a16:creationId xmlns:a16="http://schemas.microsoft.com/office/drawing/2014/main" id="{78237365-70F8-CA5A-4ED7-D9E07FD12116}"/>
+              </a:ext>
+            </a:extLst>
+          </p:cNvPr>
+          <p:cNvSpPr txBox="1"/>
+          <p:nvPr/>
+        </p:nvSpPr>
+        <p:spPr>
+          <a:xfrm>
+            <a:off x="6893027" y="4650291"/>
+            <a:ext cx="2719346" cy="217432"/>
+          </a:xfrm>
+          <a:prstGeom prst="rect">
+            <a:avLst/>
+          </a:prstGeom>
+          <a:noFill/>
+        </p:spPr>
+        <p:txBody>
+          <a:bodyPr wrap="square">
+            <a:spAutoFit/>
+          </a:bodyPr>
+          <a:lstStyle/>
+          <a:p>
+            <a:r>
+              <a:rPr lang="de-DE" sz="813" dirty="0">
+                <a:latin typeface="MesloLGSDZ Nerd Font" panose="020B0609030804020204" pitchFamily="49" charset="0"/>
+                <a:ea typeface="MesloLGSDZ Nerd Font" panose="020B0609030804020204" pitchFamily="49" charset="0"/>
+                <a:cs typeface="MesloLGSDZ Nerd Font" panose="020B0609030804020204" pitchFamily="49" charset="0"/>
+              </a:rPr>
+              <a:t>= VWIEDERHOLEN(Wert; Anzahl)</a:t>
+            </a:r>
+          </a:p>
+        </p:txBody>
+      </p:sp>
+      <p:sp>
+        <p:nvSpPr>
+          <p:cNvPr id="44" name="Textfeld 43">
+            <a:extLst>
+              <a:ext uri="{FF2B5EF4-FFF2-40B4-BE49-F238E27FC236}">
+                <a16:creationId xmlns:a16="http://schemas.microsoft.com/office/drawing/2014/main" id="{2194531E-E56F-EA29-A743-1D7B79915804}"/>
+              </a:ext>
+            </a:extLst>
+          </p:cNvPr>
+          <p:cNvSpPr txBox="1"/>
+          <p:nvPr/>
+        </p:nvSpPr>
+        <p:spPr>
+          <a:xfrm>
+            <a:off x="6922117" y="4857449"/>
+            <a:ext cx="2691093" cy="342530"/>
+          </a:xfrm>
+          <a:prstGeom prst="rect">
+            <a:avLst/>
+          </a:prstGeom>
+          <a:noFill/>
+        </p:spPr>
+        <p:txBody>
+          <a:bodyPr wrap="square" rtlCol="0">
+            <a:spAutoFit/>
+          </a:bodyPr>
+          <a:lstStyle/>
+          <a:p>
+            <a:r>
+              <a:rPr lang="de-DE" sz="813" b="1" dirty="0">
+                <a:solidFill>
+                  <a:srgbClr val="366889"/>
+                </a:solidFill>
+              </a:rPr>
+              <a:t>Erzeugt einen Vektor der Länge </a:t>
+            </a:r>
+            <a:r>
+              <a:rPr lang="de-DE" sz="813" b="1" dirty="0">
+                <a:solidFill>
+                  <a:srgbClr val="366889"/>
+                </a:solidFill>
+                <a:latin typeface="MesloLGSDZ Nerd Font" panose="020B0609030804020204" pitchFamily="49" charset="0"/>
+                <a:ea typeface="MesloLGSDZ Nerd Font" panose="020B0609030804020204" pitchFamily="49" charset="0"/>
+                <a:cs typeface="MesloLGSDZ Nerd Font" panose="020B0609030804020204" pitchFamily="49" charset="0"/>
+              </a:rPr>
+              <a:t>Anzahl</a:t>
+            </a:r>
+            <a:r>
+              <a:rPr lang="de-DE" sz="813" b="1" dirty="0">
+                <a:solidFill>
+                  <a:srgbClr val="366889"/>
+                </a:solidFill>
+              </a:rPr>
+              <a:t> mit dem angegebenen </a:t>
+            </a:r>
+            <a:r>
+              <a:rPr lang="de-DE" sz="813" b="1" dirty="0">
+                <a:solidFill>
+                  <a:srgbClr val="366889"/>
+                </a:solidFill>
+                <a:latin typeface="MesloLGSDZ Nerd Font" panose="020B0609030804020204" pitchFamily="49" charset="0"/>
+                <a:ea typeface="MesloLGSDZ Nerd Font" panose="020B0609030804020204" pitchFamily="49" charset="0"/>
+                <a:cs typeface="MesloLGSDZ Nerd Font" panose="020B0609030804020204" pitchFamily="49" charset="0"/>
+              </a:rPr>
+              <a:t>Wert</a:t>
+            </a:r>
+          </a:p>
+        </p:txBody>
+      </p:sp>
+      <p:sp>
+        <p:nvSpPr>
+          <p:cNvPr id="45" name="Textfeld 44">
+            <a:extLst>
+              <a:ext uri="{FF2B5EF4-FFF2-40B4-BE49-F238E27FC236}">
+                <a16:creationId xmlns:a16="http://schemas.microsoft.com/office/drawing/2014/main" id="{3F64657D-4B63-205B-268B-6FE9899DF6D8}"/>
+              </a:ext>
+            </a:extLst>
+          </p:cNvPr>
+          <p:cNvSpPr txBox="1"/>
+          <p:nvPr/>
+        </p:nvSpPr>
+        <p:spPr>
+          <a:xfrm>
+            <a:off x="7076127" y="5680284"/>
+            <a:ext cx="2881243" cy="371320"/>
+          </a:xfrm>
+          <a:prstGeom prst="rect">
+            <a:avLst/>
+          </a:prstGeom>
+          <a:noFill/>
+        </p:spPr>
+        <p:txBody>
+          <a:bodyPr wrap="square">
+            <a:spAutoFit/>
+          </a:bodyPr>
+          <a:lstStyle/>
           <a:p>
             <a:r>
               <a:rPr lang="de-DE" sz="813" dirty="0">
@@ -11258,48 +11340,519 @@
                 <a:ea typeface="MesloLGSDZ Nerd Font" panose="020B0609030804020204" pitchFamily="49" charset="0"/>
                 <a:cs typeface="MesloLGSDZ Nerd Font" panose="020B0609030804020204" pitchFamily="49" charset="0"/>
               </a:rPr>
-              <a:t>)</a:t>
-            </a:r>
-          </a:p>
-        </p:txBody>
-      </p:sp>
-      <p:sp>
-        <p:nvSpPr>
-          <p:cNvPr id="39" name="Textfeld 38">
-            <a:extLst>
-              <a:ext uri="{FF2B5EF4-FFF2-40B4-BE49-F238E27FC236}">
-                <a16:creationId xmlns:a16="http://schemas.microsoft.com/office/drawing/2014/main" id="{896A0C1E-0499-0DEB-B240-89F88CF7F139}"/>
-              </a:ext>
-            </a:extLst>
-          </p:cNvPr>
-          <p:cNvSpPr txBox="1"/>
-          <p:nvPr/>
-        </p:nvSpPr>
-        <p:spPr>
-          <a:xfrm>
-            <a:off x="367213" y="1608375"/>
-            <a:ext cx="2691093" cy="342530"/>
-          </a:xfrm>
-          <a:prstGeom prst="rect">
-            <a:avLst/>
-          </a:prstGeom>
-          <a:noFill/>
-        </p:spPr>
-        <p:txBody>
-          <a:bodyPr wrap="square" rtlCol="0">
-            <a:spAutoFit/>
-          </a:bodyPr>
-          <a:lstStyle/>
-          <a:p>
-            <a:r>
-              <a:rPr lang="de-DE" sz="813" dirty="0">
+              <a:t>= HWIEDERHOLEN(2; 3)</a:t>
+            </a:r>
+          </a:p>
+          <a:p>
+            <a:r>
+              <a:rPr lang="de-DE" sz="1000" dirty="0">
                 <a:solidFill>
                   <a:schemeClr val="bg2">
                     <a:lumMod val="50000"/>
                   </a:schemeClr>
                 </a:solidFill>
-              </a:rPr>
-              <a:t>Alle Vektoren mit gleichem Skalenniveau mithilfe der Schemadefinition  auswählen</a:t>
+                <a:ea typeface="MesloLGSDZ Nerd Font" panose="020B0609030804020204" pitchFamily="49" charset="0"/>
+                <a:cs typeface="MesloLGSDZ Nerd Font" panose="020B0609030804020204" pitchFamily="49" charset="0"/>
+              </a:rPr>
+              <a:t>➜ erzeugt</a:t>
+            </a:r>
+            <a:r>
+              <a:rPr lang="de-DE" sz="813" dirty="0">
+                <a:solidFill>
+                  <a:schemeClr val="bg2">
+                    <a:lumMod val="50000"/>
+                  </a:schemeClr>
+                </a:solidFill>
+                <a:latin typeface="MesloLGSDZ Nerd Font" panose="020B0609030804020204" pitchFamily="49" charset="0"/>
+                <a:ea typeface="MesloLGSDZ Nerd Font" panose="020B0609030804020204" pitchFamily="49" charset="0"/>
+                <a:cs typeface="MesloLGSDZ Nerd Font" panose="020B0609030804020204" pitchFamily="49" charset="0"/>
+              </a:rPr>
+              <a:t> {2;2;2}</a:t>
+            </a:r>
+          </a:p>
+        </p:txBody>
+      </p:sp>
+      <p:sp>
+        <p:nvSpPr>
+          <p:cNvPr id="46" name="Textfeld 45">
+            <a:extLst>
+              <a:ext uri="{FF2B5EF4-FFF2-40B4-BE49-F238E27FC236}">
+                <a16:creationId xmlns:a16="http://schemas.microsoft.com/office/drawing/2014/main" id="{12A3D320-9AAA-C508-82E8-86CA73701CA4}"/>
+              </a:ext>
+            </a:extLst>
+          </p:cNvPr>
+          <p:cNvSpPr txBox="1"/>
+          <p:nvPr/>
+        </p:nvSpPr>
+        <p:spPr>
+          <a:xfrm>
+            <a:off x="6922117" y="5524586"/>
+            <a:ext cx="564578" cy="217432"/>
+          </a:xfrm>
+          <a:prstGeom prst="rect">
+            <a:avLst/>
+          </a:prstGeom>
+          <a:noFill/>
+        </p:spPr>
+        <p:txBody>
+          <a:bodyPr wrap="none" rtlCol="0">
+            <a:spAutoFit/>
+          </a:bodyPr>
+          <a:lstStyle/>
+          <a:p>
+            <a:pPr algn="ctr"/>
+            <a:r>
+              <a:rPr lang="de-DE" sz="813" b="1" dirty="0">
+                <a:solidFill>
+                  <a:schemeClr val="bg2">
+                    <a:lumMod val="50000"/>
+                  </a:schemeClr>
+                </a:solidFill>
+              </a:rPr>
+              <a:t>Beispiel</a:t>
+            </a:r>
+          </a:p>
+        </p:txBody>
+      </p:sp>
+      <p:sp>
+        <p:nvSpPr>
+          <p:cNvPr id="47" name="Textfeld 46">
+            <a:extLst>
+              <a:ext uri="{FF2B5EF4-FFF2-40B4-BE49-F238E27FC236}">
+                <a16:creationId xmlns:a16="http://schemas.microsoft.com/office/drawing/2014/main" id="{793CB6C9-8268-E8C6-7917-9E4E2B688DE2}"/>
+              </a:ext>
+            </a:extLst>
+          </p:cNvPr>
+          <p:cNvSpPr txBox="1"/>
+          <p:nvPr/>
+        </p:nvSpPr>
+        <p:spPr>
+          <a:xfrm>
+            <a:off x="7076126" y="6047500"/>
+            <a:ext cx="2881243" cy="371320"/>
+          </a:xfrm>
+          <a:prstGeom prst="rect">
+            <a:avLst/>
+          </a:prstGeom>
+          <a:noFill/>
+        </p:spPr>
+        <p:txBody>
+          <a:bodyPr wrap="square">
+            <a:spAutoFit/>
+          </a:bodyPr>
+          <a:lstStyle/>
+          <a:p>
+            <a:r>
+              <a:rPr lang="de-DE" sz="813" dirty="0">
+                <a:solidFill>
+                  <a:schemeClr val="bg2">
+                    <a:lumMod val="50000"/>
+                  </a:schemeClr>
+                </a:solidFill>
+                <a:latin typeface="MesloLGSDZ Nerd Font" panose="020B0609030804020204" pitchFamily="49" charset="0"/>
+                <a:ea typeface="MesloLGSDZ Nerd Font" panose="020B0609030804020204" pitchFamily="49" charset="0"/>
+                <a:cs typeface="MesloLGSDZ Nerd Font" panose="020B0609030804020204" pitchFamily="49" charset="0"/>
+              </a:rPr>
+              <a:t>= HWIEDERHOLEN("dxi"; 3)</a:t>
+            </a:r>
+          </a:p>
+          <a:p>
+            <a:r>
+              <a:rPr lang="de-DE" sz="1000" dirty="0">
+                <a:solidFill>
+                  <a:schemeClr val="bg2">
+                    <a:lumMod val="50000"/>
+                  </a:schemeClr>
+                </a:solidFill>
+                <a:ea typeface="MesloLGSDZ Nerd Font" panose="020B0609030804020204" pitchFamily="49" charset="0"/>
+                <a:cs typeface="MesloLGSDZ Nerd Font" panose="020B0609030804020204" pitchFamily="49" charset="0"/>
+              </a:rPr>
+              <a:t>➜ erzeugt</a:t>
+            </a:r>
+            <a:r>
+              <a:rPr lang="de-DE" sz="813" dirty="0">
+                <a:solidFill>
+                  <a:schemeClr val="bg2">
+                    <a:lumMod val="50000"/>
+                  </a:schemeClr>
+                </a:solidFill>
+                <a:latin typeface="MesloLGSDZ Nerd Font" panose="020B0609030804020204" pitchFamily="49" charset="0"/>
+                <a:ea typeface="MesloLGSDZ Nerd Font" panose="020B0609030804020204" pitchFamily="49" charset="0"/>
+                <a:cs typeface="MesloLGSDZ Nerd Font" panose="020B0609030804020204" pitchFamily="49" charset="0"/>
+              </a:rPr>
+              <a:t> {"dxi"; "dxi"; "dxi"}</a:t>
+            </a:r>
+          </a:p>
+        </p:txBody>
+      </p:sp>
+      <p:sp>
+        <p:nvSpPr>
+          <p:cNvPr id="48" name="Textfeld 47">
+            <a:extLst>
+              <a:ext uri="{FF2B5EF4-FFF2-40B4-BE49-F238E27FC236}">
+                <a16:creationId xmlns:a16="http://schemas.microsoft.com/office/drawing/2014/main" id="{6088CA6B-34B0-2C7C-350C-16F288138639}"/>
+              </a:ext>
+            </a:extLst>
+          </p:cNvPr>
+          <p:cNvSpPr txBox="1"/>
+          <p:nvPr/>
+        </p:nvSpPr>
+        <p:spPr>
+          <a:xfrm>
+            <a:off x="6922117" y="5170470"/>
+            <a:ext cx="2691093" cy="217432"/>
+          </a:xfrm>
+          <a:prstGeom prst="rect">
+            <a:avLst/>
+          </a:prstGeom>
+          <a:noFill/>
+        </p:spPr>
+        <p:txBody>
+          <a:bodyPr wrap="square" rtlCol="0">
+            <a:spAutoFit/>
+          </a:bodyPr>
+          <a:lstStyle/>
+          <a:p>
+            <a:r>
+              <a:rPr lang="de-DE" sz="813" b="1" dirty="0">
+                <a:solidFill>
+                  <a:srgbClr val="366889"/>
+                </a:solidFill>
+                <a:latin typeface="MesloLGSDZ Nerd Font" panose="020B0609030804020204" pitchFamily="49" charset="0"/>
+                <a:ea typeface="MesloLGSDZ Nerd Font" panose="020B0609030804020204" pitchFamily="49" charset="0"/>
+                <a:cs typeface="MesloLGSDZ Nerd Font" panose="020B0609030804020204" pitchFamily="49" charset="0"/>
+              </a:rPr>
+              <a:t>HWIEDERHOLEN()</a:t>
+            </a:r>
+            <a:r>
+              <a:rPr lang="de-DE" sz="813" b="1" dirty="0">
+                <a:solidFill>
+                  <a:srgbClr val="366889"/>
+                </a:solidFill>
+              </a:rPr>
+              <a:t> erzeugt einen Zeilenvektor.</a:t>
+            </a:r>
+            <a:endParaRPr lang="de-DE" sz="813" b="1" dirty="0">
+              <a:solidFill>
+                <a:srgbClr val="366889"/>
+              </a:solidFill>
+              <a:latin typeface="MesloLGSDZ Nerd Font" panose="020B0609030804020204" pitchFamily="49" charset="0"/>
+              <a:ea typeface="MesloLGSDZ Nerd Font" panose="020B0609030804020204" pitchFamily="49" charset="0"/>
+              <a:cs typeface="MesloLGSDZ Nerd Font" panose="020B0609030804020204" pitchFamily="49" charset="0"/>
+            </a:endParaRPr>
+          </a:p>
+        </p:txBody>
+      </p:sp>
+      <p:sp>
+        <p:nvSpPr>
+          <p:cNvPr id="49" name="Textfeld 48">
+            <a:extLst>
+              <a:ext uri="{FF2B5EF4-FFF2-40B4-BE49-F238E27FC236}">
+                <a16:creationId xmlns:a16="http://schemas.microsoft.com/office/drawing/2014/main" id="{51BE8B6C-2AD1-721B-F10C-A75789C198C3}"/>
+              </a:ext>
+            </a:extLst>
+          </p:cNvPr>
+          <p:cNvSpPr txBox="1"/>
+          <p:nvPr/>
+        </p:nvSpPr>
+        <p:spPr>
+          <a:xfrm>
+            <a:off x="6922117" y="5321119"/>
+            <a:ext cx="2691093" cy="217432"/>
+          </a:xfrm>
+          <a:prstGeom prst="rect">
+            <a:avLst/>
+          </a:prstGeom>
+          <a:noFill/>
+        </p:spPr>
+        <p:txBody>
+          <a:bodyPr wrap="square" rtlCol="0">
+            <a:spAutoFit/>
+          </a:bodyPr>
+          <a:lstStyle/>
+          <a:p>
+            <a:r>
+              <a:rPr lang="de-DE" sz="813" b="1" dirty="0">
+                <a:solidFill>
+                  <a:srgbClr val="366889"/>
+                </a:solidFill>
+                <a:latin typeface="MesloLGSDZ Nerd Font" panose="020B0609030804020204" pitchFamily="49" charset="0"/>
+                <a:ea typeface="MesloLGSDZ Nerd Font" panose="020B0609030804020204" pitchFamily="49" charset="0"/>
+                <a:cs typeface="MesloLGSDZ Nerd Font" panose="020B0609030804020204" pitchFamily="49" charset="0"/>
+              </a:rPr>
+              <a:t>VWIEDERHOLEN()</a:t>
+            </a:r>
+            <a:r>
+              <a:rPr lang="de-DE" sz="813" b="1" dirty="0">
+                <a:solidFill>
+                  <a:srgbClr val="366889"/>
+                </a:solidFill>
+              </a:rPr>
+              <a:t> erzeugt einen Spaltenvektor.</a:t>
+            </a:r>
+            <a:endParaRPr lang="de-DE" sz="813" b="1" dirty="0">
+              <a:solidFill>
+                <a:srgbClr val="366889"/>
+              </a:solidFill>
+              <a:latin typeface="MesloLGSDZ Nerd Font" panose="020B0609030804020204" pitchFamily="49" charset="0"/>
+              <a:ea typeface="MesloLGSDZ Nerd Font" panose="020B0609030804020204" pitchFamily="49" charset="0"/>
+              <a:cs typeface="MesloLGSDZ Nerd Font" panose="020B0609030804020204" pitchFamily="49" charset="0"/>
+            </a:endParaRPr>
+          </a:p>
+        </p:txBody>
+      </p:sp>
+      <p:sp>
+        <p:nvSpPr>
+          <p:cNvPr id="50" name="Textfeld 49">
+            <a:extLst>
+              <a:ext uri="{FF2B5EF4-FFF2-40B4-BE49-F238E27FC236}">
+                <a16:creationId xmlns:a16="http://schemas.microsoft.com/office/drawing/2014/main" id="{9E373330-8587-5DF7-2181-2BD5FF56E782}"/>
+              </a:ext>
+            </a:extLst>
+          </p:cNvPr>
+          <p:cNvSpPr txBox="1"/>
+          <p:nvPr/>
+        </p:nvSpPr>
+        <p:spPr>
+          <a:xfrm>
+            <a:off x="3424373" y="2115618"/>
+            <a:ext cx="2919467" cy="217432"/>
+          </a:xfrm>
+          <a:prstGeom prst="rect">
+            <a:avLst/>
+          </a:prstGeom>
+          <a:noFill/>
+        </p:spPr>
+        <p:txBody>
+          <a:bodyPr wrap="square" rtlCol="0">
+            <a:spAutoFit/>
+          </a:bodyPr>
+          <a:lstStyle/>
+          <a:p>
+            <a:r>
+              <a:rPr lang="de-DE" sz="813" dirty="0">
+                <a:solidFill>
+                  <a:srgbClr val="366889"/>
+                </a:solidFill>
+              </a:rPr>
+              <a:t>Nur für </a:t>
+            </a:r>
+            <a:r>
+              <a:rPr lang="de-DE" sz="813" b="1" dirty="0">
+                <a:solidFill>
+                  <a:srgbClr val="366889"/>
+                </a:solidFill>
+              </a:rPr>
+              <a:t>die jeweilige </a:t>
+            </a:r>
+            <a:r>
+              <a:rPr lang="de-DE" sz="813" b="1" dirty="0" err="1">
+                <a:solidFill>
+                  <a:srgbClr val="366889"/>
+                </a:solidFill>
+              </a:rPr>
+              <a:t>schliessende</a:t>
+            </a:r>
+            <a:r>
+              <a:rPr lang="de-DE" sz="813" b="1" dirty="0">
+                <a:solidFill>
+                  <a:srgbClr val="366889"/>
+                </a:solidFill>
+              </a:rPr>
+              <a:t> Statistik </a:t>
+            </a:r>
+            <a:r>
+              <a:rPr lang="de-DE" sz="813" dirty="0">
+                <a:solidFill>
+                  <a:srgbClr val="366889"/>
+                </a:solidFill>
+              </a:rPr>
+              <a:t>verwenden!</a:t>
+            </a:r>
+          </a:p>
+        </p:txBody>
+      </p:sp>
+      <p:sp>
+        <p:nvSpPr>
+          <p:cNvPr id="51" name="Textfeld 50">
+            <a:extLst>
+              <a:ext uri="{FF2B5EF4-FFF2-40B4-BE49-F238E27FC236}">
+                <a16:creationId xmlns:a16="http://schemas.microsoft.com/office/drawing/2014/main" id="{097533EF-ED03-4686-BBEC-A8CFC3A4BCE4}"/>
+              </a:ext>
+            </a:extLst>
+          </p:cNvPr>
+          <p:cNvSpPr txBox="1"/>
+          <p:nvPr/>
+        </p:nvSpPr>
+        <p:spPr>
+          <a:xfrm>
+            <a:off x="3414658" y="1812209"/>
+            <a:ext cx="2778326" cy="217432"/>
+          </a:xfrm>
+          <a:prstGeom prst="rect">
+            <a:avLst/>
+          </a:prstGeom>
+          <a:noFill/>
+        </p:spPr>
+        <p:txBody>
+          <a:bodyPr wrap="none" rtlCol="0">
+            <a:spAutoFit/>
+          </a:bodyPr>
+          <a:lstStyle/>
+          <a:p>
+            <a:r>
+              <a:rPr lang="de-DE" sz="813" b="1" dirty="0"/>
+              <a:t>Alle Zeilen in denen Fehlerwerte vorkommen entfernen</a:t>
+            </a:r>
+          </a:p>
+        </p:txBody>
+      </p:sp>
+      <p:sp>
+        <p:nvSpPr>
+          <p:cNvPr id="52" name="Textfeld 51">
+            <a:extLst>
+              <a:ext uri="{FF2B5EF4-FFF2-40B4-BE49-F238E27FC236}">
+                <a16:creationId xmlns:a16="http://schemas.microsoft.com/office/drawing/2014/main" id="{986A9553-5AE0-AF1E-BB08-D6AB2B761305}"/>
+              </a:ext>
+            </a:extLst>
+          </p:cNvPr>
+          <p:cNvSpPr txBox="1"/>
+          <p:nvPr/>
+        </p:nvSpPr>
+        <p:spPr>
+          <a:xfrm>
+            <a:off x="6773802" y="3846311"/>
+            <a:ext cx="1269899" cy="246221"/>
+          </a:xfrm>
+          <a:prstGeom prst="rect">
+            <a:avLst/>
+          </a:prstGeom>
+          <a:noFill/>
+        </p:spPr>
+        <p:txBody>
+          <a:bodyPr wrap="none" rtlCol="0">
+            <a:spAutoFit/>
+          </a:bodyPr>
+          <a:lstStyle/>
+          <a:p>
+            <a:pPr algn="ctr"/>
+            <a:r>
+              <a:rPr lang="de-DE" sz="1000" b="1" dirty="0"/>
+              <a:t>Vektor-Funktionen</a:t>
+            </a:r>
+          </a:p>
+        </p:txBody>
+      </p:sp>
+      <p:sp>
+        <p:nvSpPr>
+          <p:cNvPr id="54" name="Textfeld 53">
+            <a:extLst>
+              <a:ext uri="{FF2B5EF4-FFF2-40B4-BE49-F238E27FC236}">
+                <a16:creationId xmlns:a16="http://schemas.microsoft.com/office/drawing/2014/main" id="{34808AF7-1191-058B-9AE6-22231DC43578}"/>
+              </a:ext>
+            </a:extLst>
+          </p:cNvPr>
+          <p:cNvSpPr txBox="1"/>
+          <p:nvPr/>
+        </p:nvSpPr>
+        <p:spPr>
+          <a:xfrm>
+            <a:off x="3415676" y="2350614"/>
+            <a:ext cx="564578" cy="217432"/>
+          </a:xfrm>
+          <a:prstGeom prst="rect">
+            <a:avLst/>
+          </a:prstGeom>
+          <a:noFill/>
+        </p:spPr>
+        <p:txBody>
+          <a:bodyPr wrap="none" rtlCol="0">
+            <a:spAutoFit/>
+          </a:bodyPr>
+          <a:lstStyle/>
+          <a:p>
+            <a:pPr algn="ctr"/>
+            <a:r>
+              <a:rPr lang="de-DE" sz="813" b="1" dirty="0">
+                <a:solidFill>
+                  <a:schemeClr val="bg2">
+                    <a:lumMod val="50000"/>
+                  </a:schemeClr>
+                </a:solidFill>
+              </a:rPr>
+              <a:t>Beispiel</a:t>
+            </a:r>
+          </a:p>
+        </p:txBody>
+      </p:sp>
+      <p:sp>
+        <p:nvSpPr>
+          <p:cNvPr id="55" name="Textfeld 54">
+            <a:extLst>
+              <a:ext uri="{FF2B5EF4-FFF2-40B4-BE49-F238E27FC236}">
+                <a16:creationId xmlns:a16="http://schemas.microsoft.com/office/drawing/2014/main" id="{61863786-A05E-B85A-91F3-BEDAFA037D92}"/>
+              </a:ext>
+            </a:extLst>
+          </p:cNvPr>
+          <p:cNvSpPr txBox="1"/>
+          <p:nvPr/>
+        </p:nvSpPr>
+        <p:spPr>
+          <a:xfrm>
+            <a:off x="3582752" y="2525727"/>
+            <a:ext cx="2881243" cy="467629"/>
+          </a:xfrm>
+          <a:prstGeom prst="rect">
+            <a:avLst/>
+          </a:prstGeom>
+          <a:noFill/>
+        </p:spPr>
+        <p:txBody>
+          <a:bodyPr wrap="square">
+            <a:spAutoFit/>
+          </a:bodyPr>
+          <a:lstStyle/>
+          <a:p>
+            <a:r>
+              <a:rPr lang="de-DE" sz="813" dirty="0">
+                <a:solidFill>
+                  <a:schemeClr val="bg2">
+                    <a:lumMod val="50000"/>
+                  </a:schemeClr>
+                </a:solidFill>
+                <a:latin typeface="MesloLGSDZ Nerd Font" panose="020B0609030804020204" pitchFamily="49" charset="0"/>
+                <a:ea typeface="MesloLGSDZ Nerd Font" panose="020B0609030804020204" pitchFamily="49" charset="0"/>
+                <a:cs typeface="MesloLGSDZ Nerd Font" panose="020B0609030804020204" pitchFamily="49" charset="0"/>
+              </a:rPr>
+              <a:t>= ENTFERNE.FEHLER(</a:t>
+            </a:r>
+          </a:p>
+          <a:p>
+            <a:r>
+              <a:rPr lang="de-DE" sz="813" dirty="0">
+                <a:solidFill>
+                  <a:schemeClr val="bg2">
+                    <a:lumMod val="50000"/>
+                  </a:schemeClr>
+                </a:solidFill>
+                <a:latin typeface="MesloLGSDZ Nerd Font" panose="020B0609030804020204" pitchFamily="49" charset="0"/>
+                <a:ea typeface="MesloLGSDZ Nerd Font" panose="020B0609030804020204" pitchFamily="49" charset="0"/>
+                <a:cs typeface="MesloLGSDZ Nerd Font" panose="020B0609030804020204" pitchFamily="49" charset="0"/>
+              </a:rPr>
+              <a:t>	</a:t>
+            </a:r>
+            <a:r>
+              <a:rPr lang="de-DE" sz="813" dirty="0" err="1">
+                <a:solidFill>
+                  <a:schemeClr val="bg2">
+                    <a:lumMod val="50000"/>
+                  </a:schemeClr>
+                </a:solidFill>
+                <a:latin typeface="MesloLGSDZ Nerd Font" panose="020B0609030804020204" pitchFamily="49" charset="0"/>
+                <a:ea typeface="MesloLGSDZ Nerd Font" panose="020B0609030804020204" pitchFamily="49" charset="0"/>
+                <a:cs typeface="MesloLGSDZ Nerd Font" panose="020B0609030804020204" pitchFamily="49" charset="0"/>
+              </a:rPr>
+              <a:t>werte_aus_langform</a:t>
             </a:r>
             <a:endParaRPr lang="de-DE" sz="813" dirty="0">
               <a:solidFill>
@@ -11312,221 +11865,6 @@
               <a:cs typeface="MesloLGSDZ Nerd Font" panose="020B0609030804020204" pitchFamily="49" charset="0"/>
             </a:endParaRPr>
           </a:p>
-        </p:txBody>
-      </p:sp>
-      <p:sp>
-        <p:nvSpPr>
-          <p:cNvPr id="41" name="Textfeld 40">
-            <a:extLst>
-              <a:ext uri="{FF2B5EF4-FFF2-40B4-BE49-F238E27FC236}">
-                <a16:creationId xmlns:a16="http://schemas.microsoft.com/office/drawing/2014/main" id="{E84A4909-A53D-E692-2142-97D811206166}"/>
-              </a:ext>
-            </a:extLst>
-          </p:cNvPr>
-          <p:cNvSpPr txBox="1"/>
-          <p:nvPr/>
-        </p:nvSpPr>
-        <p:spPr>
-          <a:xfrm>
-            <a:off x="181499" y="1164914"/>
-            <a:ext cx="2691093" cy="217432"/>
-          </a:xfrm>
-          <a:prstGeom prst="rect">
-            <a:avLst/>
-          </a:prstGeom>
-          <a:noFill/>
-        </p:spPr>
-        <p:txBody>
-          <a:bodyPr wrap="square" rtlCol="0">
-            <a:spAutoFit/>
-          </a:bodyPr>
-          <a:lstStyle/>
-          <a:p>
-            <a:r>
-              <a:rPr lang="de-DE" sz="813" b="1" dirty="0">
-                <a:solidFill>
-                  <a:srgbClr val="366889"/>
-                </a:solidFill>
-              </a:rPr>
-              <a:t>Das Ergebnis ist immer eine Wertematrix</a:t>
-            </a:r>
-          </a:p>
-        </p:txBody>
-      </p:sp>
-      <p:sp>
-        <p:nvSpPr>
-          <p:cNvPr id="42" name="Textfeld 41">
-            <a:extLst>
-              <a:ext uri="{FF2B5EF4-FFF2-40B4-BE49-F238E27FC236}">
-                <a16:creationId xmlns:a16="http://schemas.microsoft.com/office/drawing/2014/main" id="{19BAEC90-09A7-CAB4-18E5-62DCED44A5F5}"/>
-              </a:ext>
-            </a:extLst>
-          </p:cNvPr>
-          <p:cNvSpPr txBox="1"/>
-          <p:nvPr/>
-        </p:nvSpPr>
-        <p:spPr>
-          <a:xfrm>
-            <a:off x="6893027" y="4436732"/>
-            <a:ext cx="2719346" cy="217432"/>
-          </a:xfrm>
-          <a:prstGeom prst="rect">
-            <a:avLst/>
-          </a:prstGeom>
-          <a:noFill/>
-        </p:spPr>
-        <p:txBody>
-          <a:bodyPr wrap="square">
-            <a:spAutoFit/>
-          </a:bodyPr>
-          <a:lstStyle/>
-          <a:p>
-            <a:r>
-              <a:rPr lang="de-DE" sz="813" dirty="0">
-                <a:latin typeface="MesloLGSDZ Nerd Font" panose="020B0609030804020204" pitchFamily="49" charset="0"/>
-                <a:ea typeface="MesloLGSDZ Nerd Font" panose="020B0609030804020204" pitchFamily="49" charset="0"/>
-                <a:cs typeface="MesloLGSDZ Nerd Font" panose="020B0609030804020204" pitchFamily="49" charset="0"/>
-              </a:rPr>
-              <a:t>= HWIEDERHOLEN(Wert; Anzahl)</a:t>
-            </a:r>
-          </a:p>
-        </p:txBody>
-      </p:sp>
-      <p:sp>
-        <p:nvSpPr>
-          <p:cNvPr id="43" name="Textfeld 42">
-            <a:extLst>
-              <a:ext uri="{FF2B5EF4-FFF2-40B4-BE49-F238E27FC236}">
-                <a16:creationId xmlns:a16="http://schemas.microsoft.com/office/drawing/2014/main" id="{78237365-70F8-CA5A-4ED7-D9E07FD12116}"/>
-              </a:ext>
-            </a:extLst>
-          </p:cNvPr>
-          <p:cNvSpPr txBox="1"/>
-          <p:nvPr/>
-        </p:nvSpPr>
-        <p:spPr>
-          <a:xfrm>
-            <a:off x="6893027" y="4650291"/>
-            <a:ext cx="2719346" cy="217432"/>
-          </a:xfrm>
-          <a:prstGeom prst="rect">
-            <a:avLst/>
-          </a:prstGeom>
-          <a:noFill/>
-        </p:spPr>
-        <p:txBody>
-          <a:bodyPr wrap="square">
-            <a:spAutoFit/>
-          </a:bodyPr>
-          <a:lstStyle/>
-          <a:p>
-            <a:r>
-              <a:rPr lang="de-DE" sz="813" dirty="0">
-                <a:latin typeface="MesloLGSDZ Nerd Font" panose="020B0609030804020204" pitchFamily="49" charset="0"/>
-                <a:ea typeface="MesloLGSDZ Nerd Font" panose="020B0609030804020204" pitchFamily="49" charset="0"/>
-                <a:cs typeface="MesloLGSDZ Nerd Font" panose="020B0609030804020204" pitchFamily="49" charset="0"/>
-              </a:rPr>
-              <a:t>= VWIEDERHOLEN(Wert; Anzahl)</a:t>
-            </a:r>
-          </a:p>
-        </p:txBody>
-      </p:sp>
-      <p:sp>
-        <p:nvSpPr>
-          <p:cNvPr id="44" name="Textfeld 43">
-            <a:extLst>
-              <a:ext uri="{FF2B5EF4-FFF2-40B4-BE49-F238E27FC236}">
-                <a16:creationId xmlns:a16="http://schemas.microsoft.com/office/drawing/2014/main" id="{2194531E-E56F-EA29-A743-1D7B79915804}"/>
-              </a:ext>
-            </a:extLst>
-          </p:cNvPr>
-          <p:cNvSpPr txBox="1"/>
-          <p:nvPr/>
-        </p:nvSpPr>
-        <p:spPr>
-          <a:xfrm>
-            <a:off x="6922117" y="4857449"/>
-            <a:ext cx="2691093" cy="342530"/>
-          </a:xfrm>
-          <a:prstGeom prst="rect">
-            <a:avLst/>
-          </a:prstGeom>
-          <a:noFill/>
-        </p:spPr>
-        <p:txBody>
-          <a:bodyPr wrap="square" rtlCol="0">
-            <a:spAutoFit/>
-          </a:bodyPr>
-          <a:lstStyle/>
-          <a:p>
-            <a:r>
-              <a:rPr lang="de-DE" sz="813" b="1" dirty="0">
-                <a:solidFill>
-                  <a:srgbClr val="366889"/>
-                </a:solidFill>
-              </a:rPr>
-              <a:t>Erzeugt einen Vektor der Länge </a:t>
-            </a:r>
-            <a:r>
-              <a:rPr lang="de-DE" sz="813" b="1" dirty="0">
-                <a:solidFill>
-                  <a:srgbClr val="366889"/>
-                </a:solidFill>
-                <a:latin typeface="MesloLGSDZ Nerd Font" panose="020B0609030804020204" pitchFamily="49" charset="0"/>
-                <a:ea typeface="MesloLGSDZ Nerd Font" panose="020B0609030804020204" pitchFamily="49" charset="0"/>
-                <a:cs typeface="MesloLGSDZ Nerd Font" panose="020B0609030804020204" pitchFamily="49" charset="0"/>
-              </a:rPr>
-              <a:t>Anzahl</a:t>
-            </a:r>
-            <a:r>
-              <a:rPr lang="de-DE" sz="813" b="1" dirty="0">
-                <a:solidFill>
-                  <a:srgbClr val="366889"/>
-                </a:solidFill>
-              </a:rPr>
-              <a:t> mit dem angegebenen </a:t>
-            </a:r>
-            <a:r>
-              <a:rPr lang="de-DE" sz="813" b="1" dirty="0">
-                <a:solidFill>
-                  <a:srgbClr val="366889"/>
-                </a:solidFill>
-                <a:latin typeface="MesloLGSDZ Nerd Font" panose="020B0609030804020204" pitchFamily="49" charset="0"/>
-                <a:ea typeface="MesloLGSDZ Nerd Font" panose="020B0609030804020204" pitchFamily="49" charset="0"/>
-                <a:cs typeface="MesloLGSDZ Nerd Font" panose="020B0609030804020204" pitchFamily="49" charset="0"/>
-              </a:rPr>
-              <a:t>Wert</a:t>
-            </a:r>
-          </a:p>
-        </p:txBody>
-      </p:sp>
-      <p:sp>
-        <p:nvSpPr>
-          <p:cNvPr id="45" name="Textfeld 44">
-            <a:extLst>
-              <a:ext uri="{FF2B5EF4-FFF2-40B4-BE49-F238E27FC236}">
-                <a16:creationId xmlns:a16="http://schemas.microsoft.com/office/drawing/2014/main" id="{3F64657D-4B63-205B-268B-6FE9899DF6D8}"/>
-              </a:ext>
-            </a:extLst>
-          </p:cNvPr>
-          <p:cNvSpPr txBox="1"/>
-          <p:nvPr/>
-        </p:nvSpPr>
-        <p:spPr>
-          <a:xfrm>
-            <a:off x="7076127" y="5680284"/>
-            <a:ext cx="2881243" cy="371320"/>
-          </a:xfrm>
-          <a:prstGeom prst="rect">
-            <a:avLst/>
-          </a:prstGeom>
-          <a:noFill/>
-        </p:spPr>
-        <p:txBody>
-          <a:bodyPr wrap="square">
-            <a:spAutoFit/>
-          </a:bodyPr>
-          <a:lstStyle/>
           <a:p>
             <a:r>
               <a:rPr lang="de-DE" sz="813" dirty="0">
@@ -11539,22 +11877,171 @@
                 <a:ea typeface="MesloLGSDZ Nerd Font" panose="020B0609030804020204" pitchFamily="49" charset="0"/>
                 <a:cs typeface="MesloLGSDZ Nerd Font" panose="020B0609030804020204" pitchFamily="49" charset="0"/>
               </a:rPr>
-              <a:t>= HWIEDERHOLEN(2; 3)</a:t>
-            </a:r>
-          </a:p>
-          <a:p>
-            <a:r>
-              <a:rPr lang="de-DE" sz="1000" dirty="0">
+              <a:t>)</a:t>
+            </a:r>
+          </a:p>
+        </p:txBody>
+      </p:sp>
+      <p:sp>
+        <p:nvSpPr>
+          <p:cNvPr id="56" name="Textfeld 55">
+            <a:extLst>
+              <a:ext uri="{FF2B5EF4-FFF2-40B4-BE49-F238E27FC236}">
+                <a16:creationId xmlns:a16="http://schemas.microsoft.com/office/drawing/2014/main" id="{D5924244-43C9-6F94-AC25-D3D0F119B441}"/>
+              </a:ext>
+            </a:extLst>
+          </p:cNvPr>
+          <p:cNvSpPr txBox="1"/>
+          <p:nvPr/>
+        </p:nvSpPr>
+        <p:spPr>
+          <a:xfrm>
+            <a:off x="3435420" y="3042744"/>
+            <a:ext cx="1965603" cy="217432"/>
+          </a:xfrm>
+          <a:prstGeom prst="rect">
+            <a:avLst/>
+          </a:prstGeom>
+          <a:noFill/>
+        </p:spPr>
+        <p:txBody>
+          <a:bodyPr wrap="none" rtlCol="0">
+            <a:spAutoFit/>
+          </a:bodyPr>
+          <a:lstStyle/>
+          <a:p>
+            <a:r>
+              <a:rPr lang="de-DE" sz="813" b="1" dirty="0"/>
+              <a:t>Vektoren aus Wertematrix auswählen</a:t>
+            </a:r>
+          </a:p>
+        </p:txBody>
+      </p:sp>
+      <p:sp>
+        <p:nvSpPr>
+          <p:cNvPr id="57" name="Textfeld 56">
+            <a:extLst>
+              <a:ext uri="{FF2B5EF4-FFF2-40B4-BE49-F238E27FC236}">
+                <a16:creationId xmlns:a16="http://schemas.microsoft.com/office/drawing/2014/main" id="{180AAF23-5E9B-5FE0-7327-740A9B1A75F0}"/>
+              </a:ext>
+            </a:extLst>
+          </p:cNvPr>
+          <p:cNvSpPr txBox="1"/>
+          <p:nvPr/>
+        </p:nvSpPr>
+        <p:spPr>
+          <a:xfrm>
+            <a:off x="3435420" y="3243981"/>
+            <a:ext cx="2719346" cy="217432"/>
+          </a:xfrm>
+          <a:prstGeom prst="rect">
+            <a:avLst/>
+          </a:prstGeom>
+          <a:noFill/>
+        </p:spPr>
+        <p:txBody>
+          <a:bodyPr wrap="square">
+            <a:spAutoFit/>
+          </a:bodyPr>
+          <a:lstStyle/>
+          <a:p>
+            <a:r>
+              <a:rPr lang="de-DE" sz="813" dirty="0">
+                <a:latin typeface="MesloLGSDZ Nerd Font" panose="020B0609030804020204" pitchFamily="49" charset="0"/>
+                <a:ea typeface="MesloLGSDZ Nerd Font" panose="020B0609030804020204" pitchFamily="49" charset="0"/>
+                <a:cs typeface="MesloLGSDZ Nerd Font" panose="020B0609030804020204" pitchFamily="49" charset="0"/>
+              </a:rPr>
+              <a:t>= SPALTENWAHL(Wertematrix; </a:t>
+            </a:r>
+            <a:r>
+              <a:rPr lang="de-DE" sz="813" dirty="0" err="1">
+                <a:latin typeface="MesloLGSDZ Nerd Font" panose="020B0609030804020204" pitchFamily="49" charset="0"/>
+                <a:ea typeface="MesloLGSDZ Nerd Font" panose="020B0609030804020204" pitchFamily="49" charset="0"/>
+                <a:cs typeface="MesloLGSDZ Nerd Font" panose="020B0609030804020204" pitchFamily="49" charset="0"/>
+              </a:rPr>
+              <a:t>SpaltenNr</a:t>
+            </a:r>
+            <a:r>
+              <a:rPr lang="de-DE" sz="813" dirty="0">
+                <a:latin typeface="MesloLGSDZ Nerd Font" panose="020B0609030804020204" pitchFamily="49" charset="0"/>
+                <a:ea typeface="MesloLGSDZ Nerd Font" panose="020B0609030804020204" pitchFamily="49" charset="0"/>
+                <a:cs typeface="MesloLGSDZ Nerd Font" panose="020B0609030804020204" pitchFamily="49" charset="0"/>
+              </a:rPr>
+              <a:t>)</a:t>
+            </a:r>
+          </a:p>
+        </p:txBody>
+      </p:sp>
+      <p:sp>
+        <p:nvSpPr>
+          <p:cNvPr id="58" name="Textfeld 57">
+            <a:extLst>
+              <a:ext uri="{FF2B5EF4-FFF2-40B4-BE49-F238E27FC236}">
+                <a16:creationId xmlns:a16="http://schemas.microsoft.com/office/drawing/2014/main" id="{039B2CC3-7D0A-0790-F20E-E6A119F50AE9}"/>
+              </a:ext>
+            </a:extLst>
+          </p:cNvPr>
+          <p:cNvSpPr txBox="1"/>
+          <p:nvPr/>
+        </p:nvSpPr>
+        <p:spPr>
+          <a:xfrm>
+            <a:off x="3428676" y="3717443"/>
+            <a:ext cx="564578" cy="217432"/>
+          </a:xfrm>
+          <a:prstGeom prst="rect">
+            <a:avLst/>
+          </a:prstGeom>
+          <a:noFill/>
+        </p:spPr>
+        <p:txBody>
+          <a:bodyPr wrap="none" rtlCol="0">
+            <a:spAutoFit/>
+          </a:bodyPr>
+          <a:lstStyle/>
+          <a:p>
+            <a:pPr algn="ctr"/>
+            <a:r>
+              <a:rPr lang="de-DE" sz="813" b="1" dirty="0">
                 <a:solidFill>
                   <a:schemeClr val="bg2">
                     <a:lumMod val="50000"/>
                   </a:schemeClr>
                 </a:solidFill>
-                <a:ea typeface="MesloLGSDZ Nerd Font" panose="020B0609030804020204" pitchFamily="49" charset="0"/>
-                <a:cs typeface="MesloLGSDZ Nerd Font" panose="020B0609030804020204" pitchFamily="49" charset="0"/>
-              </a:rPr>
-              <a:t>➜ erzeugt</a:t>
-            </a:r>
+              </a:rPr>
+              <a:t>Beispiel</a:t>
+            </a:r>
+          </a:p>
+        </p:txBody>
+      </p:sp>
+      <p:sp>
+        <p:nvSpPr>
+          <p:cNvPr id="59" name="Textfeld 58">
+            <a:extLst>
+              <a:ext uri="{FF2B5EF4-FFF2-40B4-BE49-F238E27FC236}">
+                <a16:creationId xmlns:a16="http://schemas.microsoft.com/office/drawing/2014/main" id="{BAF00C57-BB6F-28A6-720B-92F867FBB9DC}"/>
+              </a:ext>
+            </a:extLst>
+          </p:cNvPr>
+          <p:cNvSpPr txBox="1"/>
+          <p:nvPr/>
+        </p:nvSpPr>
+        <p:spPr>
+          <a:xfrm>
+            <a:off x="3608361" y="3898132"/>
+            <a:ext cx="2881243" cy="217432"/>
+          </a:xfrm>
+          <a:prstGeom prst="rect">
+            <a:avLst/>
+          </a:prstGeom>
+          <a:noFill/>
+        </p:spPr>
+        <p:txBody>
+          <a:bodyPr wrap="square">
+            <a:spAutoFit/>
+          </a:bodyPr>
+          <a:lstStyle/>
+          <a:p>
             <a:r>
               <a:rPr lang="de-DE" sz="813" dirty="0">
                 <a:solidFill>
@@ -11566,27 +12053,82 @@
                 <a:ea typeface="MesloLGSDZ Nerd Font" panose="020B0609030804020204" pitchFamily="49" charset="0"/>
                 <a:cs typeface="MesloLGSDZ Nerd Font" panose="020B0609030804020204" pitchFamily="49" charset="0"/>
               </a:rPr>
-              <a:t> {2;2;2}</a:t>
-            </a:r>
-          </a:p>
-        </p:txBody>
-      </p:sp>
-      <p:sp>
-        <p:nvSpPr>
-          <p:cNvPr id="46" name="Textfeld 45">
-            <a:extLst>
-              <a:ext uri="{FF2B5EF4-FFF2-40B4-BE49-F238E27FC236}">
-                <a16:creationId xmlns:a16="http://schemas.microsoft.com/office/drawing/2014/main" id="{12A3D320-9AAA-C508-82E8-86CA73701CA4}"/>
-              </a:ext>
-            </a:extLst>
-          </p:cNvPr>
-          <p:cNvSpPr txBox="1"/>
-          <p:nvPr/>
-        </p:nvSpPr>
-        <p:spPr>
-          <a:xfrm>
-            <a:off x="6922117" y="5524586"/>
-            <a:ext cx="564578" cy="217432"/>
+              <a:t>= SPALTENWAHL(A2#; 1)</a:t>
+            </a:r>
+          </a:p>
+        </p:txBody>
+      </p:sp>
+      <p:sp>
+        <p:nvSpPr>
+          <p:cNvPr id="60" name="Textfeld 59">
+            <a:extLst>
+              <a:ext uri="{FF2B5EF4-FFF2-40B4-BE49-F238E27FC236}">
+                <a16:creationId xmlns:a16="http://schemas.microsoft.com/office/drawing/2014/main" id="{1F181EED-A193-1E4F-19E2-D57804C9A7E9}"/>
+              </a:ext>
+            </a:extLst>
+          </p:cNvPr>
+          <p:cNvSpPr txBox="1"/>
+          <p:nvPr/>
+        </p:nvSpPr>
+        <p:spPr>
+          <a:xfrm>
+            <a:off x="3443907" y="3438379"/>
+            <a:ext cx="3059389" cy="342530"/>
+          </a:xfrm>
+          <a:prstGeom prst="rect">
+            <a:avLst/>
+          </a:prstGeom>
+          <a:noFill/>
+        </p:spPr>
+        <p:txBody>
+          <a:bodyPr wrap="square" rtlCol="0">
+            <a:spAutoFit/>
+          </a:bodyPr>
+          <a:lstStyle/>
+          <a:p>
+            <a:r>
+              <a:rPr lang="de-DE" sz="813" b="1" dirty="0">
+                <a:solidFill>
+                  <a:srgbClr val="366889"/>
+                </a:solidFill>
+              </a:rPr>
+              <a:t>Wählt die Spalte mit der </a:t>
+            </a:r>
+            <a:r>
+              <a:rPr lang="de-DE" sz="813" b="1" dirty="0" err="1">
+                <a:solidFill>
+                  <a:srgbClr val="366889"/>
+                </a:solidFill>
+              </a:rPr>
+              <a:t>SpaltenNr</a:t>
+            </a:r>
+            <a:r>
+              <a:rPr lang="de-DE" sz="813" b="1" dirty="0">
+                <a:solidFill>
+                  <a:srgbClr val="366889"/>
+                </a:solidFill>
+              </a:rPr>
+              <a:t> aus einer Wertematrix aus.</a:t>
+            </a:r>
+          </a:p>
+        </p:txBody>
+      </p:sp>
+      <p:sp>
+        <p:nvSpPr>
+          <p:cNvPr id="62" name="Textfeld 61">
+            <a:extLst>
+              <a:ext uri="{FF2B5EF4-FFF2-40B4-BE49-F238E27FC236}">
+                <a16:creationId xmlns:a16="http://schemas.microsoft.com/office/drawing/2014/main" id="{713566B6-83FF-2A38-C983-D9215C7F4011}"/>
+              </a:ext>
+            </a:extLst>
+          </p:cNvPr>
+          <p:cNvSpPr txBox="1"/>
+          <p:nvPr/>
+        </p:nvSpPr>
+        <p:spPr>
+          <a:xfrm>
+            <a:off x="3443907" y="4560306"/>
+            <a:ext cx="3057247" cy="217432"/>
           </a:xfrm>
           <a:prstGeom prst="rect">
             <a:avLst/>
@@ -11599,47 +12141,98 @@
           </a:bodyPr>
           <a:lstStyle/>
           <a:p>
-            <a:pPr algn="ctr"/>
-            <a:r>
-              <a:rPr lang="de-DE" sz="813" b="1" dirty="0">
+            <a:r>
+              <a:rPr lang="de-DE" sz="813" b="1" dirty="0"/>
+              <a:t>Test für die </a:t>
+            </a:r>
+            <a:r>
+              <a:rPr lang="de-DE" sz="813" b="1" dirty="0" err="1"/>
+              <a:t>schliessende</a:t>
+            </a:r>
+            <a:r>
+              <a:rPr lang="de-DE" sz="813" b="1" dirty="0"/>
+              <a:t> Statistik durchführen (s. Rückseite)</a:t>
+            </a:r>
+          </a:p>
+        </p:txBody>
+      </p:sp>
+      <p:sp>
+        <p:nvSpPr>
+          <p:cNvPr id="63" name="Textfeld 62">
+            <a:extLst>
+              <a:ext uri="{FF2B5EF4-FFF2-40B4-BE49-F238E27FC236}">
+                <a16:creationId xmlns:a16="http://schemas.microsoft.com/office/drawing/2014/main" id="{EA2ABAA5-1432-9E5A-4516-91DB53C3410F}"/>
+              </a:ext>
+            </a:extLst>
+          </p:cNvPr>
+          <p:cNvSpPr txBox="1"/>
+          <p:nvPr/>
+        </p:nvSpPr>
+        <p:spPr>
+          <a:xfrm>
+            <a:off x="179316" y="2220572"/>
+            <a:ext cx="1757212" cy="217432"/>
+          </a:xfrm>
+          <a:prstGeom prst="rect">
+            <a:avLst/>
+          </a:prstGeom>
+          <a:noFill/>
+        </p:spPr>
+        <p:txBody>
+          <a:bodyPr wrap="none" rtlCol="0">
+            <a:spAutoFit/>
+          </a:bodyPr>
+          <a:lstStyle/>
+          <a:p>
+            <a:r>
+              <a:rPr lang="de-DE" sz="813" b="1" dirty="0"/>
+              <a:t>Deskriptive Statistik durchführen</a:t>
+            </a:r>
+          </a:p>
+        </p:txBody>
+      </p:sp>
+      <p:sp>
+        <p:nvSpPr>
+          <p:cNvPr id="64" name="Textfeld 63">
+            <a:extLst>
+              <a:ext uri="{FF2B5EF4-FFF2-40B4-BE49-F238E27FC236}">
+                <a16:creationId xmlns:a16="http://schemas.microsoft.com/office/drawing/2014/main" id="{611B243A-6557-3410-55AA-11EE00594F64}"/>
+              </a:ext>
+            </a:extLst>
+          </p:cNvPr>
+          <p:cNvSpPr txBox="1"/>
+          <p:nvPr/>
+        </p:nvSpPr>
+        <p:spPr>
+          <a:xfrm>
+            <a:off x="404708" y="2635599"/>
+            <a:ext cx="2875711" cy="842923"/>
+          </a:xfrm>
+          <a:prstGeom prst="rect">
+            <a:avLst/>
+          </a:prstGeom>
+          <a:noFill/>
+        </p:spPr>
+        <p:txBody>
+          <a:bodyPr wrap="square">
+            <a:spAutoFit/>
+          </a:bodyPr>
+          <a:lstStyle/>
+          <a:p>
+            <a:r>
+              <a:rPr lang="de-DE" sz="813" dirty="0">
                 <a:solidFill>
                   <a:schemeClr val="bg2">
                     <a:lumMod val="50000"/>
                   </a:schemeClr>
                 </a:solidFill>
-              </a:rPr>
-              <a:t>Beispiel</a:t>
-            </a:r>
-          </a:p>
-        </p:txBody>
-      </p:sp>
-      <p:sp>
-        <p:nvSpPr>
-          <p:cNvPr id="47" name="Textfeld 46">
-            <a:extLst>
-              <a:ext uri="{FF2B5EF4-FFF2-40B4-BE49-F238E27FC236}">
-                <a16:creationId xmlns:a16="http://schemas.microsoft.com/office/drawing/2014/main" id="{793CB6C9-8268-E8C6-7917-9E4E2B688DE2}"/>
-              </a:ext>
-            </a:extLst>
-          </p:cNvPr>
-          <p:cNvSpPr txBox="1"/>
-          <p:nvPr/>
-        </p:nvSpPr>
-        <p:spPr>
-          <a:xfrm>
-            <a:off x="7076126" y="6047500"/>
-            <a:ext cx="2881243" cy="371320"/>
-          </a:xfrm>
-          <a:prstGeom prst="rect">
-            <a:avLst/>
-          </a:prstGeom>
-          <a:noFill/>
-        </p:spPr>
-        <p:txBody>
-          <a:bodyPr wrap="square">
-            <a:spAutoFit/>
-          </a:bodyPr>
-          <a:lstStyle/>
+                <a:latin typeface="MesloLGSDZ Nerd Font" panose="020B0609030804020204" pitchFamily="49" charset="0"/>
+                <a:ea typeface="MesloLGSDZ Nerd Font" panose="020B0609030804020204" pitchFamily="49" charset="0"/>
+                <a:cs typeface="MesloLGSDZ Nerd Font" panose="020B0609030804020204" pitchFamily="49" charset="0"/>
+              </a:rPr>
+              <a:t>= STAT.DESKRIPTIV(</a:t>
+            </a:r>
+          </a:p>
           <a:p>
             <a:r>
               <a:rPr lang="de-DE" sz="813" dirty="0">
@@ -11652,22 +12245,25 @@
                 <a:ea typeface="MesloLGSDZ Nerd Font" panose="020B0609030804020204" pitchFamily="49" charset="0"/>
                 <a:cs typeface="MesloLGSDZ Nerd Font" panose="020B0609030804020204" pitchFamily="49" charset="0"/>
               </a:rPr>
-              <a:t>= HWIEDERHOLEN("dxi"; 3)</a:t>
-            </a:r>
-          </a:p>
-          <a:p>
-            <a:r>
-              <a:rPr lang="de-DE" sz="1000" dirty="0">
+              <a:t>    D2#; </a:t>
+            </a:r>
+          </a:p>
+          <a:p>
+            <a:r>
+              <a:rPr lang="de-DE" sz="813" dirty="0">
                 <a:solidFill>
                   <a:schemeClr val="bg2">
                     <a:lumMod val="50000"/>
                   </a:schemeClr>
                 </a:solidFill>
-                <a:ea typeface="MesloLGSDZ Nerd Font" panose="020B0609030804020204" pitchFamily="49" charset="0"/>
-                <a:cs typeface="MesloLGSDZ Nerd Font" panose="020B0609030804020204" pitchFamily="49" charset="0"/>
-              </a:rPr>
-              <a:t>➜ erzeugt</a:t>
-            </a:r>
+                <a:latin typeface="MesloLGSDZ Nerd Font" panose="020B0609030804020204" pitchFamily="49" charset="0"/>
+                <a:ea typeface="MesloLGSDZ Nerd Font" panose="020B0609030804020204" pitchFamily="49" charset="0"/>
+                <a:cs typeface="MesloLGSDZ Nerd Font" panose="020B0609030804020204" pitchFamily="49" charset="0"/>
+              </a:rPr>
+              <a:t>    "ordinal“;</a:t>
+            </a:r>
+          </a:p>
+          <a:p>
             <a:r>
               <a:rPr lang="de-DE" sz="813" dirty="0">
                 <a:solidFill>
@@ -11679,338 +12275,24 @@
                 <a:ea typeface="MesloLGSDZ Nerd Font" panose="020B0609030804020204" pitchFamily="49" charset="0"/>
                 <a:cs typeface="MesloLGSDZ Nerd Font" panose="020B0609030804020204" pitchFamily="49" charset="0"/>
               </a:rPr>
-              <a:t> {"dxi"; "dxi"; "dxi"}</a:t>
-            </a:r>
-          </a:p>
-        </p:txBody>
-      </p:sp>
-      <p:sp>
-        <p:nvSpPr>
-          <p:cNvPr id="48" name="Textfeld 47">
-            <a:extLst>
-              <a:ext uri="{FF2B5EF4-FFF2-40B4-BE49-F238E27FC236}">
-                <a16:creationId xmlns:a16="http://schemas.microsoft.com/office/drawing/2014/main" id="{6088CA6B-34B0-2C7C-350C-16F288138639}"/>
-              </a:ext>
-            </a:extLst>
-          </p:cNvPr>
-          <p:cNvSpPr txBox="1"/>
-          <p:nvPr/>
-        </p:nvSpPr>
-        <p:spPr>
-          <a:xfrm>
-            <a:off x="6922117" y="5170470"/>
-            <a:ext cx="2691093" cy="217432"/>
-          </a:xfrm>
-          <a:prstGeom prst="rect">
-            <a:avLst/>
-          </a:prstGeom>
-          <a:noFill/>
-        </p:spPr>
-        <p:txBody>
-          <a:bodyPr wrap="square" rtlCol="0">
-            <a:spAutoFit/>
-          </a:bodyPr>
-          <a:lstStyle/>
-          <a:p>
-            <a:r>
-              <a:rPr lang="de-DE" sz="813" b="1" dirty="0">
-                <a:solidFill>
-                  <a:srgbClr val="366889"/>
-                </a:solidFill>
-                <a:latin typeface="MesloLGSDZ Nerd Font" panose="020B0609030804020204" pitchFamily="49" charset="0"/>
-                <a:ea typeface="MesloLGSDZ Nerd Font" panose="020B0609030804020204" pitchFamily="49" charset="0"/>
-                <a:cs typeface="MesloLGSDZ Nerd Font" panose="020B0609030804020204" pitchFamily="49" charset="0"/>
-              </a:rPr>
-              <a:t>HWIEDERHOLEN()</a:t>
-            </a:r>
-            <a:r>
-              <a:rPr lang="de-DE" sz="813" b="1" dirty="0">
-                <a:solidFill>
-                  <a:srgbClr val="366889"/>
-                </a:solidFill>
-              </a:rPr>
-              <a:t> erzeugt einen Zeilenvektor.</a:t>
-            </a:r>
-            <a:endParaRPr lang="de-DE" sz="813" b="1" dirty="0">
-              <a:solidFill>
-                <a:srgbClr val="366889"/>
-              </a:solidFill>
-              <a:latin typeface="MesloLGSDZ Nerd Font" panose="020B0609030804020204" pitchFamily="49" charset="0"/>
-              <a:ea typeface="MesloLGSDZ Nerd Font" panose="020B0609030804020204" pitchFamily="49" charset="0"/>
-              <a:cs typeface="MesloLGSDZ Nerd Font" panose="020B0609030804020204" pitchFamily="49" charset="0"/>
-            </a:endParaRPr>
-          </a:p>
-        </p:txBody>
-      </p:sp>
-      <p:sp>
-        <p:nvSpPr>
-          <p:cNvPr id="49" name="Textfeld 48">
-            <a:extLst>
-              <a:ext uri="{FF2B5EF4-FFF2-40B4-BE49-F238E27FC236}">
-                <a16:creationId xmlns:a16="http://schemas.microsoft.com/office/drawing/2014/main" id="{51BE8B6C-2AD1-721B-F10C-A75789C198C3}"/>
-              </a:ext>
-            </a:extLst>
-          </p:cNvPr>
-          <p:cNvSpPr txBox="1"/>
-          <p:nvPr/>
-        </p:nvSpPr>
-        <p:spPr>
-          <a:xfrm>
-            <a:off x="6922117" y="5321119"/>
-            <a:ext cx="2691093" cy="217432"/>
-          </a:xfrm>
-          <a:prstGeom prst="rect">
-            <a:avLst/>
-          </a:prstGeom>
-          <a:noFill/>
-        </p:spPr>
-        <p:txBody>
-          <a:bodyPr wrap="square" rtlCol="0">
-            <a:spAutoFit/>
-          </a:bodyPr>
-          <a:lstStyle/>
-          <a:p>
-            <a:r>
-              <a:rPr lang="de-DE" sz="813" b="1" dirty="0">
-                <a:solidFill>
-                  <a:srgbClr val="366889"/>
-                </a:solidFill>
-                <a:latin typeface="MesloLGSDZ Nerd Font" panose="020B0609030804020204" pitchFamily="49" charset="0"/>
-                <a:ea typeface="MesloLGSDZ Nerd Font" panose="020B0609030804020204" pitchFamily="49" charset="0"/>
-                <a:cs typeface="MesloLGSDZ Nerd Font" panose="020B0609030804020204" pitchFamily="49" charset="0"/>
-              </a:rPr>
-              <a:t>VWIEDERHOLEN()</a:t>
-            </a:r>
-            <a:r>
-              <a:rPr lang="de-DE" sz="813" b="1" dirty="0">
-                <a:solidFill>
-                  <a:srgbClr val="366889"/>
-                </a:solidFill>
-              </a:rPr>
-              <a:t> erzeugt einen Spaltenvektor.</a:t>
-            </a:r>
-            <a:endParaRPr lang="de-DE" sz="813" b="1" dirty="0">
-              <a:solidFill>
-                <a:srgbClr val="366889"/>
-              </a:solidFill>
-              <a:latin typeface="MesloLGSDZ Nerd Font" panose="020B0609030804020204" pitchFamily="49" charset="0"/>
-              <a:ea typeface="MesloLGSDZ Nerd Font" panose="020B0609030804020204" pitchFamily="49" charset="0"/>
-              <a:cs typeface="MesloLGSDZ Nerd Font" panose="020B0609030804020204" pitchFamily="49" charset="0"/>
-            </a:endParaRPr>
-          </a:p>
-        </p:txBody>
-      </p:sp>
-      <p:sp>
-        <p:nvSpPr>
-          <p:cNvPr id="50" name="Textfeld 49">
-            <a:extLst>
-              <a:ext uri="{FF2B5EF4-FFF2-40B4-BE49-F238E27FC236}">
-                <a16:creationId xmlns:a16="http://schemas.microsoft.com/office/drawing/2014/main" id="{9E373330-8587-5DF7-2181-2BD5FF56E782}"/>
-              </a:ext>
-            </a:extLst>
-          </p:cNvPr>
-          <p:cNvSpPr txBox="1"/>
-          <p:nvPr/>
-        </p:nvSpPr>
-        <p:spPr>
-          <a:xfrm>
-            <a:off x="3441768" y="1682447"/>
-            <a:ext cx="2691093" cy="217432"/>
-          </a:xfrm>
-          <a:prstGeom prst="rect">
-            <a:avLst/>
-          </a:prstGeom>
-          <a:noFill/>
-        </p:spPr>
-        <p:txBody>
-          <a:bodyPr wrap="square" rtlCol="0">
-            <a:spAutoFit/>
-          </a:bodyPr>
-          <a:lstStyle/>
-          <a:p>
-            <a:r>
-              <a:rPr lang="de-DE" sz="813" dirty="0">
-                <a:solidFill>
-                  <a:srgbClr val="366889"/>
-                </a:solidFill>
-              </a:rPr>
-              <a:t>Nur für </a:t>
-            </a:r>
-            <a:r>
-              <a:rPr lang="de-DE" sz="813" b="1" dirty="0">
-                <a:solidFill>
-                  <a:srgbClr val="366889"/>
-                </a:solidFill>
-              </a:rPr>
-              <a:t>die </a:t>
-            </a:r>
-            <a:r>
-              <a:rPr lang="de-DE" sz="813" b="1" dirty="0" err="1">
-                <a:solidFill>
-                  <a:srgbClr val="366889"/>
-                </a:solidFill>
-              </a:rPr>
-              <a:t>schliessende</a:t>
-            </a:r>
-            <a:r>
-              <a:rPr lang="de-DE" sz="813" b="1" dirty="0">
-                <a:solidFill>
-                  <a:srgbClr val="366889"/>
-                </a:solidFill>
-              </a:rPr>
-              <a:t> Statistik </a:t>
-            </a:r>
-            <a:r>
-              <a:rPr lang="de-DE" sz="813" dirty="0">
-                <a:solidFill>
-                  <a:srgbClr val="366889"/>
-                </a:solidFill>
-              </a:rPr>
-              <a:t>verwenden!</a:t>
-            </a:r>
-          </a:p>
-        </p:txBody>
-      </p:sp>
-      <p:sp>
-        <p:nvSpPr>
-          <p:cNvPr id="51" name="Textfeld 50">
-            <a:extLst>
-              <a:ext uri="{FF2B5EF4-FFF2-40B4-BE49-F238E27FC236}">
-                <a16:creationId xmlns:a16="http://schemas.microsoft.com/office/drawing/2014/main" id="{097533EF-ED03-4686-BBEC-A8CFC3A4BCE4}"/>
-              </a:ext>
-            </a:extLst>
-          </p:cNvPr>
-          <p:cNvSpPr txBox="1"/>
-          <p:nvPr/>
-        </p:nvSpPr>
-        <p:spPr>
-          <a:xfrm>
-            <a:off x="3432053" y="1379038"/>
-            <a:ext cx="2778326" cy="217432"/>
-          </a:xfrm>
-          <a:prstGeom prst="rect">
-            <a:avLst/>
-          </a:prstGeom>
-          <a:noFill/>
-        </p:spPr>
-        <p:txBody>
-          <a:bodyPr wrap="none" rtlCol="0">
-            <a:spAutoFit/>
-          </a:bodyPr>
-          <a:lstStyle/>
-          <a:p>
-            <a:r>
-              <a:rPr lang="de-DE" sz="813" b="1" dirty="0"/>
-              <a:t>Alle Zeilen in denen Fehlerwerte vorkommen entfernen</a:t>
-            </a:r>
-          </a:p>
-        </p:txBody>
-      </p:sp>
-      <p:sp>
-        <p:nvSpPr>
-          <p:cNvPr id="52" name="Textfeld 51">
-            <a:extLst>
-              <a:ext uri="{FF2B5EF4-FFF2-40B4-BE49-F238E27FC236}">
-                <a16:creationId xmlns:a16="http://schemas.microsoft.com/office/drawing/2014/main" id="{986A9553-5AE0-AF1E-BB08-D6AB2B761305}"/>
-              </a:ext>
-            </a:extLst>
-          </p:cNvPr>
-          <p:cNvSpPr txBox="1"/>
-          <p:nvPr/>
-        </p:nvSpPr>
-        <p:spPr>
-          <a:xfrm>
-            <a:off x="6773802" y="3846311"/>
-            <a:ext cx="1269899" cy="246221"/>
-          </a:xfrm>
-          <a:prstGeom prst="rect">
-            <a:avLst/>
-          </a:prstGeom>
-          <a:noFill/>
-        </p:spPr>
-        <p:txBody>
-          <a:bodyPr wrap="none" rtlCol="0">
-            <a:spAutoFit/>
-          </a:bodyPr>
-          <a:lstStyle/>
-          <a:p>
-            <a:pPr algn="ctr"/>
-            <a:r>
-              <a:rPr lang="de-DE" sz="1000" b="1" dirty="0"/>
-              <a:t>Vektor-Funktionen</a:t>
-            </a:r>
-          </a:p>
-        </p:txBody>
-      </p:sp>
-      <p:sp>
-        <p:nvSpPr>
-          <p:cNvPr id="54" name="Textfeld 53">
-            <a:extLst>
-              <a:ext uri="{FF2B5EF4-FFF2-40B4-BE49-F238E27FC236}">
-                <a16:creationId xmlns:a16="http://schemas.microsoft.com/office/drawing/2014/main" id="{34808AF7-1191-058B-9AE6-22231DC43578}"/>
-              </a:ext>
-            </a:extLst>
-          </p:cNvPr>
-          <p:cNvSpPr txBox="1"/>
-          <p:nvPr/>
-        </p:nvSpPr>
-        <p:spPr>
-          <a:xfrm>
-            <a:off x="3433071" y="1917443"/>
-            <a:ext cx="564578" cy="217432"/>
-          </a:xfrm>
-          <a:prstGeom prst="rect">
-            <a:avLst/>
-          </a:prstGeom>
-          <a:noFill/>
-        </p:spPr>
-        <p:txBody>
-          <a:bodyPr wrap="none" rtlCol="0">
-            <a:spAutoFit/>
-          </a:bodyPr>
-          <a:lstStyle/>
-          <a:p>
-            <a:pPr algn="ctr"/>
-            <a:r>
-              <a:rPr lang="de-DE" sz="813" b="1" dirty="0">
+              <a:t>    A1#;</a:t>
+            </a:r>
+          </a:p>
+          <a:p>
+            <a:r>
+              <a:rPr lang="de-DE" sz="813" dirty="0">
                 <a:solidFill>
                   <a:schemeClr val="bg2">
                     <a:lumMod val="50000"/>
                   </a:schemeClr>
                 </a:solidFill>
-              </a:rPr>
-              <a:t>Beispiel</a:t>
-            </a:r>
-          </a:p>
-        </p:txBody>
-      </p:sp>
-      <p:sp>
-        <p:nvSpPr>
-          <p:cNvPr id="55" name="Textfeld 54">
-            <a:extLst>
-              <a:ext uri="{FF2B5EF4-FFF2-40B4-BE49-F238E27FC236}">
-                <a16:creationId xmlns:a16="http://schemas.microsoft.com/office/drawing/2014/main" id="{61863786-A05E-B85A-91F3-BEDAFA037D92}"/>
-              </a:ext>
-            </a:extLst>
-          </p:cNvPr>
-          <p:cNvSpPr txBox="1"/>
-          <p:nvPr/>
-        </p:nvSpPr>
-        <p:spPr>
-          <a:xfrm>
-            <a:off x="3600147" y="2092556"/>
-            <a:ext cx="2881243" cy="592726"/>
-          </a:xfrm>
-          <a:prstGeom prst="rect">
-            <a:avLst/>
-          </a:prstGeom>
-          <a:noFill/>
-        </p:spPr>
-        <p:txBody>
-          <a:bodyPr wrap="square">
-            <a:spAutoFit/>
-          </a:bodyPr>
-          <a:lstStyle/>
+                <a:latin typeface="MesloLGSDZ Nerd Font" panose="020B0609030804020204" pitchFamily="49" charset="0"/>
+                <a:ea typeface="MesloLGSDZ Nerd Font" panose="020B0609030804020204" pitchFamily="49" charset="0"/>
+                <a:cs typeface="MesloLGSDZ Nerd Font" panose="020B0609030804020204" pitchFamily="49" charset="0"/>
+              </a:rPr>
+              <a:t>    WAHR</a:t>
+            </a:r>
+          </a:p>
           <a:p>
             <a:r>
               <a:rPr lang="de-DE" sz="813" dirty="0">
@@ -12023,786 +12305,49 @@
                 <a:ea typeface="MesloLGSDZ Nerd Font" panose="020B0609030804020204" pitchFamily="49" charset="0"/>
                 <a:cs typeface="MesloLGSDZ Nerd Font" panose="020B0609030804020204" pitchFamily="49" charset="0"/>
               </a:rPr>
-              <a:t>= ENTFERNE.FEHLER(</a:t>
-            </a:r>
-          </a:p>
-          <a:p>
-            <a:r>
-              <a:rPr lang="de-DE" sz="813" dirty="0">
+              <a:t>)</a:t>
+            </a:r>
+          </a:p>
+        </p:txBody>
+      </p:sp>
+      <p:sp>
+        <p:nvSpPr>
+          <p:cNvPr id="65" name="Textfeld 64">
+            <a:extLst>
+              <a:ext uri="{FF2B5EF4-FFF2-40B4-BE49-F238E27FC236}">
+                <a16:creationId xmlns:a16="http://schemas.microsoft.com/office/drawing/2014/main" id="{02D74356-0990-5C5E-A374-FD55EB724301}"/>
+              </a:ext>
+            </a:extLst>
+          </p:cNvPr>
+          <p:cNvSpPr txBox="1"/>
+          <p:nvPr/>
+        </p:nvSpPr>
+        <p:spPr>
+          <a:xfrm>
+            <a:off x="264537" y="2492786"/>
+            <a:ext cx="1502335" cy="217432"/>
+          </a:xfrm>
+          <a:prstGeom prst="rect">
+            <a:avLst/>
+          </a:prstGeom>
+          <a:noFill/>
+        </p:spPr>
+        <p:txBody>
+          <a:bodyPr wrap="none" rtlCol="0">
+            <a:spAutoFit/>
+          </a:bodyPr>
+          <a:lstStyle/>
+          <a:p>
+            <a:pPr algn="ctr"/>
+            <a:r>
+              <a:rPr lang="de-DE" sz="813" b="1" dirty="0">
                 <a:solidFill>
                   <a:schemeClr val="bg2">
                     <a:lumMod val="50000"/>
                   </a:schemeClr>
                 </a:solidFill>
-                <a:latin typeface="MesloLGSDZ Nerd Font" panose="020B0609030804020204" pitchFamily="49" charset="0"/>
-                <a:ea typeface="MesloLGSDZ Nerd Font" panose="020B0609030804020204" pitchFamily="49" charset="0"/>
-                <a:cs typeface="MesloLGSDZ Nerd Font" panose="020B0609030804020204" pitchFamily="49" charset="0"/>
-              </a:rPr>
-              <a:t>     TABELLEN.AUSWAHL(“Daten"; </a:t>
-            </a:r>
-          </a:p>
-          <a:p>
-            <a:r>
-              <a:rPr lang="de-DE" sz="813" dirty="0">
-                <a:solidFill>
-                  <a:schemeClr val="bg2">
-                    <a:lumMod val="50000"/>
-                  </a:schemeClr>
-                </a:solidFill>
-                <a:latin typeface="MesloLGSDZ Nerd Font" panose="020B0609030804020204" pitchFamily="49" charset="0"/>
-                <a:ea typeface="MesloLGSDZ Nerd Font" panose="020B0609030804020204" pitchFamily="49" charset="0"/>
-                <a:cs typeface="MesloLGSDZ Nerd Font" panose="020B0609030804020204" pitchFamily="49" charset="0"/>
-              </a:rPr>
-              <a:t>                      {“</a:t>
-            </a:r>
-            <a:r>
-              <a:rPr lang="de-DE" sz="813" dirty="0" err="1">
-                <a:solidFill>
-                  <a:schemeClr val="bg2">
-                    <a:lumMod val="50000"/>
-                  </a:schemeClr>
-                </a:solidFill>
-                <a:latin typeface="MesloLGSDZ Nerd Font" panose="020B0609030804020204" pitchFamily="49" charset="0"/>
-                <a:ea typeface="MesloLGSDZ Nerd Font" panose="020B0609030804020204" pitchFamily="49" charset="0"/>
-                <a:cs typeface="MesloLGSDZ Nerd Font" panose="020B0609030804020204" pitchFamily="49" charset="0"/>
-              </a:rPr>
-              <a:t>abhV</a:t>
-            </a:r>
-            <a:r>
-              <a:rPr lang="de-DE" sz="813" dirty="0">
-                <a:solidFill>
-                  <a:schemeClr val="bg2">
-                    <a:lumMod val="50000"/>
-                  </a:schemeClr>
-                </a:solidFill>
-                <a:latin typeface="MesloLGSDZ Nerd Font" panose="020B0609030804020204" pitchFamily="49" charset="0"/>
-                <a:ea typeface="MesloLGSDZ Nerd Font" panose="020B0609030804020204" pitchFamily="49" charset="0"/>
-                <a:cs typeface="MesloLGSDZ Nerd Font" panose="020B0609030804020204" pitchFamily="49" charset="0"/>
-              </a:rPr>
-              <a:t>"; “</a:t>
-            </a:r>
-            <a:r>
-              <a:rPr lang="de-DE" sz="813" dirty="0" err="1">
-                <a:solidFill>
-                  <a:schemeClr val="bg2">
-                    <a:lumMod val="50000"/>
-                  </a:schemeClr>
-                </a:solidFill>
-                <a:latin typeface="MesloLGSDZ Nerd Font" panose="020B0609030804020204" pitchFamily="49" charset="0"/>
-                <a:ea typeface="MesloLGSDZ Nerd Font" panose="020B0609030804020204" pitchFamily="49" charset="0"/>
-                <a:cs typeface="MesloLGSDZ Nerd Font" panose="020B0609030804020204" pitchFamily="49" charset="0"/>
-              </a:rPr>
-              <a:t>unabhV</a:t>
-            </a:r>
-            <a:r>
-              <a:rPr lang="de-DE" sz="813" dirty="0">
-                <a:solidFill>
-                  <a:schemeClr val="bg2">
-                    <a:lumMod val="50000"/>
-                  </a:schemeClr>
-                </a:solidFill>
-                <a:latin typeface="MesloLGSDZ Nerd Font" panose="020B0609030804020204" pitchFamily="49" charset="0"/>
-                <a:ea typeface="MesloLGSDZ Nerd Font" panose="020B0609030804020204" pitchFamily="49" charset="0"/>
-                <a:cs typeface="MesloLGSDZ Nerd Font" panose="020B0609030804020204" pitchFamily="49" charset="0"/>
-              </a:rPr>
-              <a:t>"})</a:t>
-            </a:r>
-          </a:p>
-          <a:p>
-            <a:r>
-              <a:rPr lang="de-DE" sz="813" dirty="0">
-                <a:solidFill>
-                  <a:schemeClr val="bg2">
-                    <a:lumMod val="50000"/>
-                  </a:schemeClr>
-                </a:solidFill>
-                <a:latin typeface="MesloLGSDZ Nerd Font" panose="020B0609030804020204" pitchFamily="49" charset="0"/>
-                <a:ea typeface="MesloLGSDZ Nerd Font" panose="020B0609030804020204" pitchFamily="49" charset="0"/>
-                <a:cs typeface="MesloLGSDZ Nerd Font" panose="020B0609030804020204" pitchFamily="49" charset="0"/>
-              </a:rPr>
-              <a:t>)</a:t>
-            </a:r>
-          </a:p>
-        </p:txBody>
-      </p:sp>
-      <p:sp>
-        <p:nvSpPr>
-          <p:cNvPr id="56" name="Textfeld 55">
-            <a:extLst>
-              <a:ext uri="{FF2B5EF4-FFF2-40B4-BE49-F238E27FC236}">
-                <a16:creationId xmlns:a16="http://schemas.microsoft.com/office/drawing/2014/main" id="{D5924244-43C9-6F94-AC25-D3D0F119B441}"/>
-              </a:ext>
-            </a:extLst>
-          </p:cNvPr>
-          <p:cNvSpPr txBox="1"/>
-          <p:nvPr/>
-        </p:nvSpPr>
-        <p:spPr>
-          <a:xfrm>
-            <a:off x="3439815" y="2707460"/>
-            <a:ext cx="1965603" cy="217432"/>
-          </a:xfrm>
-          <a:prstGeom prst="rect">
-            <a:avLst/>
-          </a:prstGeom>
-          <a:noFill/>
-        </p:spPr>
-        <p:txBody>
-          <a:bodyPr wrap="none" rtlCol="0">
-            <a:spAutoFit/>
-          </a:bodyPr>
-          <a:lstStyle/>
-          <a:p>
-            <a:r>
-              <a:rPr lang="de-DE" sz="813" b="1" dirty="0"/>
-              <a:t>Vektoren aus Wertematrix auswählen</a:t>
-            </a:r>
-          </a:p>
-        </p:txBody>
-      </p:sp>
-      <p:sp>
-        <p:nvSpPr>
-          <p:cNvPr id="57" name="Textfeld 56">
-            <a:extLst>
-              <a:ext uri="{FF2B5EF4-FFF2-40B4-BE49-F238E27FC236}">
-                <a16:creationId xmlns:a16="http://schemas.microsoft.com/office/drawing/2014/main" id="{180AAF23-5E9B-5FE0-7327-740A9B1A75F0}"/>
-              </a:ext>
-            </a:extLst>
-          </p:cNvPr>
-          <p:cNvSpPr txBox="1"/>
-          <p:nvPr/>
-        </p:nvSpPr>
-        <p:spPr>
-          <a:xfrm>
-            <a:off x="3439815" y="2908697"/>
-            <a:ext cx="2719346" cy="217432"/>
-          </a:xfrm>
-          <a:prstGeom prst="rect">
-            <a:avLst/>
-          </a:prstGeom>
-          <a:noFill/>
-        </p:spPr>
-        <p:txBody>
-          <a:bodyPr wrap="square">
-            <a:spAutoFit/>
-          </a:bodyPr>
-          <a:lstStyle/>
-          <a:p>
-            <a:r>
-              <a:rPr lang="de-DE" sz="813" dirty="0">
-                <a:latin typeface="MesloLGSDZ Nerd Font" panose="020B0609030804020204" pitchFamily="49" charset="0"/>
-                <a:ea typeface="MesloLGSDZ Nerd Font" panose="020B0609030804020204" pitchFamily="49" charset="0"/>
-                <a:cs typeface="MesloLGSDZ Nerd Font" panose="020B0609030804020204" pitchFamily="49" charset="0"/>
-              </a:rPr>
-              <a:t>= SPALTENWAHL(Wertematrix; </a:t>
-            </a:r>
-            <a:r>
-              <a:rPr lang="de-DE" sz="813" dirty="0" err="1">
-                <a:latin typeface="MesloLGSDZ Nerd Font" panose="020B0609030804020204" pitchFamily="49" charset="0"/>
-                <a:ea typeface="MesloLGSDZ Nerd Font" panose="020B0609030804020204" pitchFamily="49" charset="0"/>
-                <a:cs typeface="MesloLGSDZ Nerd Font" panose="020B0609030804020204" pitchFamily="49" charset="0"/>
-              </a:rPr>
-              <a:t>SpaltenNr</a:t>
-            </a:r>
-            <a:r>
-              <a:rPr lang="de-DE" sz="813" dirty="0">
-                <a:latin typeface="MesloLGSDZ Nerd Font" panose="020B0609030804020204" pitchFamily="49" charset="0"/>
-                <a:ea typeface="MesloLGSDZ Nerd Font" panose="020B0609030804020204" pitchFamily="49" charset="0"/>
-                <a:cs typeface="MesloLGSDZ Nerd Font" panose="020B0609030804020204" pitchFamily="49" charset="0"/>
-              </a:rPr>
-              <a:t>)</a:t>
-            </a:r>
-          </a:p>
-        </p:txBody>
-      </p:sp>
-      <p:sp>
-        <p:nvSpPr>
-          <p:cNvPr id="58" name="Textfeld 57">
-            <a:extLst>
-              <a:ext uri="{FF2B5EF4-FFF2-40B4-BE49-F238E27FC236}">
-                <a16:creationId xmlns:a16="http://schemas.microsoft.com/office/drawing/2014/main" id="{039B2CC3-7D0A-0790-F20E-E6A119F50AE9}"/>
-              </a:ext>
-            </a:extLst>
-          </p:cNvPr>
-          <p:cNvSpPr txBox="1"/>
-          <p:nvPr/>
-        </p:nvSpPr>
-        <p:spPr>
-          <a:xfrm>
-            <a:off x="3433071" y="3382159"/>
-            <a:ext cx="564578" cy="217432"/>
-          </a:xfrm>
-          <a:prstGeom prst="rect">
-            <a:avLst/>
-          </a:prstGeom>
-          <a:noFill/>
-        </p:spPr>
-        <p:txBody>
-          <a:bodyPr wrap="none" rtlCol="0">
-            <a:spAutoFit/>
-          </a:bodyPr>
-          <a:lstStyle/>
-          <a:p>
-            <a:pPr algn="ctr"/>
-            <a:r>
-              <a:rPr lang="de-DE" sz="813" b="1" dirty="0">
-                <a:solidFill>
-                  <a:schemeClr val="bg2">
-                    <a:lumMod val="50000"/>
-                  </a:schemeClr>
-                </a:solidFill>
-              </a:rPr>
-              <a:t>Beispiel</a:t>
-            </a:r>
-          </a:p>
-        </p:txBody>
-      </p:sp>
-      <p:sp>
-        <p:nvSpPr>
-          <p:cNvPr id="59" name="Textfeld 58">
-            <a:extLst>
-              <a:ext uri="{FF2B5EF4-FFF2-40B4-BE49-F238E27FC236}">
-                <a16:creationId xmlns:a16="http://schemas.microsoft.com/office/drawing/2014/main" id="{BAF00C57-BB6F-28A6-720B-92F867FBB9DC}"/>
-              </a:ext>
-            </a:extLst>
-          </p:cNvPr>
-          <p:cNvSpPr txBox="1"/>
-          <p:nvPr/>
-        </p:nvSpPr>
-        <p:spPr>
-          <a:xfrm>
-            <a:off x="3612756" y="3562848"/>
-            <a:ext cx="2881243" cy="217432"/>
-          </a:xfrm>
-          <a:prstGeom prst="rect">
-            <a:avLst/>
-          </a:prstGeom>
-          <a:noFill/>
-        </p:spPr>
-        <p:txBody>
-          <a:bodyPr wrap="square">
-            <a:spAutoFit/>
-          </a:bodyPr>
-          <a:lstStyle/>
-          <a:p>
-            <a:r>
-              <a:rPr lang="de-DE" sz="813" dirty="0">
-                <a:solidFill>
-                  <a:schemeClr val="bg2">
-                    <a:lumMod val="50000"/>
-                  </a:schemeClr>
-                </a:solidFill>
-                <a:latin typeface="MesloLGSDZ Nerd Font" panose="020B0609030804020204" pitchFamily="49" charset="0"/>
-                <a:ea typeface="MesloLGSDZ Nerd Font" panose="020B0609030804020204" pitchFamily="49" charset="0"/>
-                <a:cs typeface="MesloLGSDZ Nerd Font" panose="020B0609030804020204" pitchFamily="49" charset="0"/>
-              </a:rPr>
-              <a:t>= SPALTENWAHL(A2#; 1)</a:t>
-            </a:r>
-          </a:p>
-        </p:txBody>
-      </p:sp>
-      <p:sp>
-        <p:nvSpPr>
-          <p:cNvPr id="60" name="Textfeld 59">
-            <a:extLst>
-              <a:ext uri="{FF2B5EF4-FFF2-40B4-BE49-F238E27FC236}">
-                <a16:creationId xmlns:a16="http://schemas.microsoft.com/office/drawing/2014/main" id="{1F181EED-A193-1E4F-19E2-D57804C9A7E9}"/>
-              </a:ext>
-            </a:extLst>
-          </p:cNvPr>
-          <p:cNvSpPr txBox="1"/>
-          <p:nvPr/>
-        </p:nvSpPr>
-        <p:spPr>
-          <a:xfrm>
-            <a:off x="3448302" y="3103095"/>
-            <a:ext cx="3059389" cy="342530"/>
-          </a:xfrm>
-          <a:prstGeom prst="rect">
-            <a:avLst/>
-          </a:prstGeom>
-          <a:noFill/>
-        </p:spPr>
-        <p:txBody>
-          <a:bodyPr wrap="square" rtlCol="0">
-            <a:spAutoFit/>
-          </a:bodyPr>
-          <a:lstStyle/>
-          <a:p>
-            <a:r>
-              <a:rPr lang="de-DE" sz="813" b="1" dirty="0">
-                <a:solidFill>
-                  <a:srgbClr val="366889"/>
-                </a:solidFill>
-              </a:rPr>
-              <a:t>Wählt die Spalte mit der </a:t>
-            </a:r>
-            <a:r>
-              <a:rPr lang="de-DE" sz="813" b="1" dirty="0" err="1">
-                <a:solidFill>
-                  <a:srgbClr val="366889"/>
-                </a:solidFill>
-              </a:rPr>
-              <a:t>SpaltenNr</a:t>
-            </a:r>
-            <a:r>
-              <a:rPr lang="de-DE" sz="813" b="1" dirty="0">
-                <a:solidFill>
-                  <a:srgbClr val="366889"/>
-                </a:solidFill>
-              </a:rPr>
-              <a:t> aus einer Wertematrix aus.</a:t>
-            </a:r>
-          </a:p>
-        </p:txBody>
-      </p:sp>
-      <p:sp>
-        <p:nvSpPr>
-          <p:cNvPr id="62" name="Textfeld 61">
-            <a:extLst>
-              <a:ext uri="{FF2B5EF4-FFF2-40B4-BE49-F238E27FC236}">
-                <a16:creationId xmlns:a16="http://schemas.microsoft.com/office/drawing/2014/main" id="{713566B6-83FF-2A38-C983-D9215C7F4011}"/>
-              </a:ext>
-            </a:extLst>
-          </p:cNvPr>
-          <p:cNvSpPr txBox="1"/>
-          <p:nvPr/>
-        </p:nvSpPr>
-        <p:spPr>
-          <a:xfrm>
-            <a:off x="3455181" y="4297532"/>
-            <a:ext cx="3057247" cy="217432"/>
-          </a:xfrm>
-          <a:prstGeom prst="rect">
-            <a:avLst/>
-          </a:prstGeom>
-          <a:noFill/>
-        </p:spPr>
-        <p:txBody>
-          <a:bodyPr wrap="none" rtlCol="0">
-            <a:spAutoFit/>
-          </a:bodyPr>
-          <a:lstStyle/>
-          <a:p>
-            <a:r>
-              <a:rPr lang="de-DE" sz="813" b="1" dirty="0"/>
-              <a:t>Test für die </a:t>
-            </a:r>
-            <a:r>
-              <a:rPr lang="de-DE" sz="813" b="1" dirty="0" err="1"/>
-              <a:t>schliessende</a:t>
-            </a:r>
-            <a:r>
-              <a:rPr lang="de-DE" sz="813" b="1" dirty="0"/>
-              <a:t> Statistik durchführen (s. Rückseite)</a:t>
-            </a:r>
-          </a:p>
-        </p:txBody>
-      </p:sp>
-      <p:sp>
-        <p:nvSpPr>
-          <p:cNvPr id="63" name="Textfeld 62">
-            <a:extLst>
-              <a:ext uri="{FF2B5EF4-FFF2-40B4-BE49-F238E27FC236}">
-                <a16:creationId xmlns:a16="http://schemas.microsoft.com/office/drawing/2014/main" id="{EA2ABAA5-1432-9E5A-4516-91DB53C3410F}"/>
-              </a:ext>
-            </a:extLst>
-          </p:cNvPr>
-          <p:cNvSpPr txBox="1"/>
-          <p:nvPr/>
-        </p:nvSpPr>
-        <p:spPr>
-          <a:xfrm>
-            <a:off x="179316" y="2652502"/>
-            <a:ext cx="1757212" cy="217432"/>
-          </a:xfrm>
-          <a:prstGeom prst="rect">
-            <a:avLst/>
-          </a:prstGeom>
-          <a:noFill/>
-        </p:spPr>
-        <p:txBody>
-          <a:bodyPr wrap="none" rtlCol="0">
-            <a:spAutoFit/>
-          </a:bodyPr>
-          <a:lstStyle/>
-          <a:p>
-            <a:r>
-              <a:rPr lang="de-DE" sz="813" b="1" dirty="0"/>
-              <a:t>Deskriptive Statistik durchführen</a:t>
-            </a:r>
-          </a:p>
-        </p:txBody>
-      </p:sp>
-      <p:sp>
-        <p:nvSpPr>
-          <p:cNvPr id="64" name="Textfeld 63">
-            <a:extLst>
-              <a:ext uri="{FF2B5EF4-FFF2-40B4-BE49-F238E27FC236}">
-                <a16:creationId xmlns:a16="http://schemas.microsoft.com/office/drawing/2014/main" id="{611B243A-6557-3410-55AA-11EE00594F64}"/>
-              </a:ext>
-            </a:extLst>
-          </p:cNvPr>
-          <p:cNvSpPr txBox="1"/>
-          <p:nvPr/>
-        </p:nvSpPr>
-        <p:spPr>
-          <a:xfrm>
-            <a:off x="404708" y="2966439"/>
-            <a:ext cx="2875711" cy="842923"/>
-          </a:xfrm>
-          <a:prstGeom prst="rect">
-            <a:avLst/>
-          </a:prstGeom>
-          <a:noFill/>
-        </p:spPr>
-        <p:txBody>
-          <a:bodyPr wrap="square">
-            <a:spAutoFit/>
-          </a:bodyPr>
-          <a:lstStyle/>
-          <a:p>
-            <a:r>
-              <a:rPr lang="de-DE" sz="813" dirty="0">
-                <a:solidFill>
-                  <a:schemeClr val="bg2">
-                    <a:lumMod val="50000"/>
-                  </a:schemeClr>
-                </a:solidFill>
-                <a:latin typeface="MesloLGSDZ Nerd Font" panose="020B0609030804020204" pitchFamily="49" charset="0"/>
-                <a:ea typeface="MesloLGSDZ Nerd Font" panose="020B0609030804020204" pitchFamily="49" charset="0"/>
-                <a:cs typeface="MesloLGSDZ Nerd Font" panose="020B0609030804020204" pitchFamily="49" charset="0"/>
-              </a:rPr>
-              <a:t>= STAT.DESKRIPTIV(</a:t>
-            </a:r>
-          </a:p>
-          <a:p>
-            <a:r>
-              <a:rPr lang="de-DE" sz="813" dirty="0">
-                <a:solidFill>
-                  <a:schemeClr val="bg2">
-                    <a:lumMod val="50000"/>
-                  </a:schemeClr>
-                </a:solidFill>
-                <a:latin typeface="MesloLGSDZ Nerd Font" panose="020B0609030804020204" pitchFamily="49" charset="0"/>
-                <a:ea typeface="MesloLGSDZ Nerd Font" panose="020B0609030804020204" pitchFamily="49" charset="0"/>
-                <a:cs typeface="MesloLGSDZ Nerd Font" panose="020B0609030804020204" pitchFamily="49" charset="0"/>
-              </a:rPr>
-              <a:t>    Wertematrix; </a:t>
-            </a:r>
-          </a:p>
-          <a:p>
-            <a:r>
-              <a:rPr lang="de-DE" sz="813" dirty="0">
-                <a:solidFill>
-                  <a:schemeClr val="bg2">
-                    <a:lumMod val="50000"/>
-                  </a:schemeClr>
-                </a:solidFill>
-                <a:latin typeface="MesloLGSDZ Nerd Font" panose="020B0609030804020204" pitchFamily="49" charset="0"/>
-                <a:ea typeface="MesloLGSDZ Nerd Font" panose="020B0609030804020204" pitchFamily="49" charset="0"/>
-                <a:cs typeface="MesloLGSDZ Nerd Font" panose="020B0609030804020204" pitchFamily="49" charset="0"/>
-              </a:rPr>
-              <a:t>    "ordinal“;</a:t>
-            </a:r>
-          </a:p>
-          <a:p>
-            <a:r>
-              <a:rPr lang="de-DE" sz="813" dirty="0">
-                <a:solidFill>
-                  <a:schemeClr val="bg2">
-                    <a:lumMod val="50000"/>
-                  </a:schemeClr>
-                </a:solidFill>
-                <a:latin typeface="MesloLGSDZ Nerd Font" panose="020B0609030804020204" pitchFamily="49" charset="0"/>
-                <a:ea typeface="MesloLGSDZ Nerd Font" panose="020B0609030804020204" pitchFamily="49" charset="0"/>
-                <a:cs typeface="MesloLGSDZ Nerd Font" panose="020B0609030804020204" pitchFamily="49" charset="0"/>
-              </a:rPr>
-              <a:t>    FILTER(Schema[Name];</a:t>
-            </a:r>
-          </a:p>
-          <a:p>
-            <a:r>
-              <a:rPr lang="de-DE" sz="813" dirty="0">
-                <a:solidFill>
-                  <a:schemeClr val="bg2">
-                    <a:lumMod val="50000"/>
-                  </a:schemeClr>
-                </a:solidFill>
-                <a:latin typeface="MesloLGSDZ Nerd Font" panose="020B0609030804020204" pitchFamily="49" charset="0"/>
-                <a:ea typeface="MesloLGSDZ Nerd Font" panose="020B0609030804020204" pitchFamily="49" charset="0"/>
-                <a:cs typeface="MesloLGSDZ Nerd Font" panose="020B0609030804020204" pitchFamily="49" charset="0"/>
-              </a:rPr>
-              <a:t>           Schema[Skalierung] = "ordinal“)</a:t>
-            </a:r>
-          </a:p>
-          <a:p>
-            <a:r>
-              <a:rPr lang="de-DE" sz="813" dirty="0">
-                <a:solidFill>
-                  <a:schemeClr val="bg2">
-                    <a:lumMod val="50000"/>
-                  </a:schemeClr>
-                </a:solidFill>
-                <a:latin typeface="MesloLGSDZ Nerd Font" panose="020B0609030804020204" pitchFamily="49" charset="0"/>
-                <a:ea typeface="MesloLGSDZ Nerd Font" panose="020B0609030804020204" pitchFamily="49" charset="0"/>
-                <a:cs typeface="MesloLGSDZ Nerd Font" panose="020B0609030804020204" pitchFamily="49" charset="0"/>
-              </a:rPr>
-              <a:t>)</a:t>
-            </a:r>
-          </a:p>
-        </p:txBody>
-      </p:sp>
-      <p:sp>
-        <p:nvSpPr>
-          <p:cNvPr id="65" name="Textfeld 64">
-            <a:extLst>
-              <a:ext uri="{FF2B5EF4-FFF2-40B4-BE49-F238E27FC236}">
-                <a16:creationId xmlns:a16="http://schemas.microsoft.com/office/drawing/2014/main" id="{02D74356-0990-5C5E-A374-FD55EB724301}"/>
-              </a:ext>
-            </a:extLst>
-          </p:cNvPr>
-          <p:cNvSpPr txBox="1"/>
-          <p:nvPr/>
-        </p:nvSpPr>
-        <p:spPr>
-          <a:xfrm>
-            <a:off x="233551" y="2831596"/>
-            <a:ext cx="564578" cy="217432"/>
-          </a:xfrm>
-          <a:prstGeom prst="rect">
-            <a:avLst/>
-          </a:prstGeom>
-          <a:noFill/>
-        </p:spPr>
-        <p:txBody>
-          <a:bodyPr wrap="none" rtlCol="0">
-            <a:spAutoFit/>
-          </a:bodyPr>
-          <a:lstStyle/>
-          <a:p>
-            <a:pPr algn="ctr"/>
-            <a:r>
-              <a:rPr lang="de-DE" sz="813" b="1" dirty="0">
-                <a:solidFill>
-                  <a:schemeClr val="bg2">
-                    <a:lumMod val="50000"/>
-                  </a:schemeClr>
-                </a:solidFill>
-              </a:rPr>
-              <a:t>Beispiel</a:t>
-            </a:r>
-          </a:p>
-        </p:txBody>
-      </p:sp>
-      <p:sp>
-        <p:nvSpPr>
-          <p:cNvPr id="66" name="Textfeld 65">
-            <a:extLst>
-              <a:ext uri="{FF2B5EF4-FFF2-40B4-BE49-F238E27FC236}">
-                <a16:creationId xmlns:a16="http://schemas.microsoft.com/office/drawing/2014/main" id="{9A933940-3FBF-8647-9E1D-67B569B18126}"/>
-              </a:ext>
-            </a:extLst>
-          </p:cNvPr>
-          <p:cNvSpPr txBox="1"/>
-          <p:nvPr/>
-        </p:nvSpPr>
-        <p:spPr>
-          <a:xfrm>
-            <a:off x="3553897" y="755313"/>
-            <a:ext cx="2881243" cy="342530"/>
-          </a:xfrm>
-          <a:prstGeom prst="rect">
-            <a:avLst/>
-          </a:prstGeom>
-          <a:noFill/>
-        </p:spPr>
-        <p:txBody>
-          <a:bodyPr wrap="square">
-            <a:spAutoFit/>
-          </a:bodyPr>
-          <a:lstStyle/>
-          <a:p>
-            <a:r>
-              <a:rPr lang="de-DE" sz="813" dirty="0">
-                <a:solidFill>
-                  <a:schemeClr val="bg2">
-                    <a:lumMod val="50000"/>
-                  </a:schemeClr>
-                </a:solidFill>
-                <a:latin typeface="MesloLGSDZ Nerd Font" panose="020B0609030804020204" pitchFamily="49" charset="0"/>
-                <a:ea typeface="MesloLGSDZ Nerd Font" panose="020B0609030804020204" pitchFamily="49" charset="0"/>
-                <a:cs typeface="MesloLGSDZ Nerd Font" panose="020B0609030804020204" pitchFamily="49" charset="0"/>
-              </a:rPr>
-              <a:t>= TABELLEN.AUSWAHL(“Daten"; </a:t>
-            </a:r>
-          </a:p>
-          <a:p>
-            <a:r>
-              <a:rPr lang="de-DE" sz="813" dirty="0">
-                <a:solidFill>
-                  <a:schemeClr val="bg2">
-                    <a:lumMod val="50000"/>
-                  </a:schemeClr>
-                </a:solidFill>
-                <a:latin typeface="MesloLGSDZ Nerd Font" panose="020B0609030804020204" pitchFamily="49" charset="0"/>
-                <a:ea typeface="MesloLGSDZ Nerd Font" panose="020B0609030804020204" pitchFamily="49" charset="0"/>
-                <a:cs typeface="MesloLGSDZ Nerd Font" panose="020B0609030804020204" pitchFamily="49" charset="0"/>
-              </a:rPr>
-              <a:t>                   {“</a:t>
-            </a:r>
-            <a:r>
-              <a:rPr lang="de-DE" sz="813" dirty="0" err="1">
-                <a:solidFill>
-                  <a:schemeClr val="bg2">
-                    <a:lumMod val="50000"/>
-                  </a:schemeClr>
-                </a:solidFill>
-                <a:latin typeface="MesloLGSDZ Nerd Font" panose="020B0609030804020204" pitchFamily="49" charset="0"/>
-                <a:ea typeface="MesloLGSDZ Nerd Font" panose="020B0609030804020204" pitchFamily="49" charset="0"/>
-                <a:cs typeface="MesloLGSDZ Nerd Font" panose="020B0609030804020204" pitchFamily="49" charset="0"/>
-              </a:rPr>
-              <a:t>abhV</a:t>
-            </a:r>
-            <a:r>
-              <a:rPr lang="de-DE" sz="813" dirty="0">
-                <a:solidFill>
-                  <a:schemeClr val="bg2">
-                    <a:lumMod val="50000"/>
-                  </a:schemeClr>
-                </a:solidFill>
-                <a:latin typeface="MesloLGSDZ Nerd Font" panose="020B0609030804020204" pitchFamily="49" charset="0"/>
-                <a:ea typeface="MesloLGSDZ Nerd Font" panose="020B0609030804020204" pitchFamily="49" charset="0"/>
-                <a:cs typeface="MesloLGSDZ Nerd Font" panose="020B0609030804020204" pitchFamily="49" charset="0"/>
-              </a:rPr>
-              <a:t>"; “</a:t>
-            </a:r>
-            <a:r>
-              <a:rPr lang="de-DE" sz="813" dirty="0" err="1">
-                <a:solidFill>
-                  <a:schemeClr val="bg2">
-                    <a:lumMod val="50000"/>
-                  </a:schemeClr>
-                </a:solidFill>
-                <a:latin typeface="MesloLGSDZ Nerd Font" panose="020B0609030804020204" pitchFamily="49" charset="0"/>
-                <a:ea typeface="MesloLGSDZ Nerd Font" panose="020B0609030804020204" pitchFamily="49" charset="0"/>
-                <a:cs typeface="MesloLGSDZ Nerd Font" panose="020B0609030804020204" pitchFamily="49" charset="0"/>
-              </a:rPr>
-              <a:t>unabhV</a:t>
-            </a:r>
-            <a:r>
-              <a:rPr lang="de-DE" sz="813" dirty="0">
-                <a:solidFill>
-                  <a:schemeClr val="bg2">
-                    <a:lumMod val="50000"/>
-                  </a:schemeClr>
-                </a:solidFill>
-                <a:latin typeface="MesloLGSDZ Nerd Font" panose="020B0609030804020204" pitchFamily="49" charset="0"/>
-                <a:ea typeface="MesloLGSDZ Nerd Font" panose="020B0609030804020204" pitchFamily="49" charset="0"/>
-                <a:cs typeface="MesloLGSDZ Nerd Font" panose="020B0609030804020204" pitchFamily="49" charset="0"/>
-              </a:rPr>
-              <a:t>"})</a:t>
-            </a:r>
-          </a:p>
-        </p:txBody>
-      </p:sp>
-      <p:sp>
-        <p:nvSpPr>
-          <p:cNvPr id="67" name="Textfeld 66">
-            <a:extLst>
-              <a:ext uri="{FF2B5EF4-FFF2-40B4-BE49-F238E27FC236}">
-                <a16:creationId xmlns:a16="http://schemas.microsoft.com/office/drawing/2014/main" id="{74471B90-7F39-8457-DF65-169AEFA87787}"/>
-              </a:ext>
-            </a:extLst>
-          </p:cNvPr>
-          <p:cNvSpPr txBox="1"/>
-          <p:nvPr/>
-        </p:nvSpPr>
-        <p:spPr>
-          <a:xfrm>
-            <a:off x="3433071" y="599615"/>
-            <a:ext cx="564578" cy="217432"/>
-          </a:xfrm>
-          <a:prstGeom prst="rect">
-            <a:avLst/>
-          </a:prstGeom>
-          <a:noFill/>
-        </p:spPr>
-        <p:txBody>
-          <a:bodyPr wrap="none" rtlCol="0">
-            <a:spAutoFit/>
-          </a:bodyPr>
-          <a:lstStyle/>
-          <a:p>
-            <a:pPr algn="ctr"/>
-            <a:r>
-              <a:rPr lang="de-DE" sz="813" b="1" dirty="0">
-                <a:solidFill>
-                  <a:schemeClr val="bg2">
-                    <a:lumMod val="50000"/>
-                  </a:schemeClr>
-                </a:solidFill>
-              </a:rPr>
-              <a:t>Beispiel</a:t>
-            </a:r>
-          </a:p>
-        </p:txBody>
-      </p:sp>
-      <p:sp>
-        <p:nvSpPr>
-          <p:cNvPr id="68" name="Textfeld 67">
-            <a:extLst>
-              <a:ext uri="{FF2B5EF4-FFF2-40B4-BE49-F238E27FC236}">
-                <a16:creationId xmlns:a16="http://schemas.microsoft.com/office/drawing/2014/main" id="{3059407B-4FC7-042B-CA60-592B7FA229E2}"/>
-              </a:ext>
-            </a:extLst>
-          </p:cNvPr>
-          <p:cNvSpPr txBox="1"/>
-          <p:nvPr/>
-        </p:nvSpPr>
-        <p:spPr>
-          <a:xfrm>
-            <a:off x="3553897" y="1039287"/>
-            <a:ext cx="2866855" cy="342530"/>
-          </a:xfrm>
-          <a:prstGeom prst="rect">
-            <a:avLst/>
-          </a:prstGeom>
-          <a:noFill/>
-        </p:spPr>
-        <p:txBody>
-          <a:bodyPr wrap="square">
-            <a:spAutoFit/>
-          </a:bodyPr>
-          <a:lstStyle/>
-          <a:p>
-            <a:r>
-              <a:rPr lang="de-DE" sz="813" dirty="0">
-                <a:solidFill>
-                  <a:schemeClr val="bg2">
-                    <a:lumMod val="50000"/>
-                  </a:schemeClr>
-                </a:solidFill>
-                <a:latin typeface="MesloLGSDZ Nerd Font" panose="020B0609030804020204" pitchFamily="49" charset="0"/>
-                <a:ea typeface="MesloLGSDZ Nerd Font" panose="020B0609030804020204" pitchFamily="49" charset="0"/>
-                <a:cs typeface="MesloLGSDZ Nerd Font" panose="020B0609030804020204" pitchFamily="49" charset="0"/>
-              </a:rPr>
-              <a:t>= TABELLEN.AUSWAHL(“Daten"; </a:t>
-            </a:r>
-          </a:p>
-          <a:p>
-            <a:r>
-              <a:rPr lang="de-DE" sz="813" dirty="0">
-                <a:solidFill>
-                  <a:schemeClr val="bg2">
-                    <a:lumMod val="50000"/>
-                  </a:schemeClr>
-                </a:solidFill>
-                <a:latin typeface="MesloLGSDZ Nerd Font" panose="020B0609030804020204" pitchFamily="49" charset="0"/>
-                <a:ea typeface="MesloLGSDZ Nerd Font" panose="020B0609030804020204" pitchFamily="49" charset="0"/>
-                <a:cs typeface="MesloLGSDZ Nerd Font" panose="020B0609030804020204" pitchFamily="49" charset="0"/>
-              </a:rPr>
-              <a:t>                   A1:B1)</a:t>
+              </a:rPr>
+              <a:t>Beispiel (für ordinale Daten)</a:t>
             </a:r>
           </a:p>
         </p:txBody>
@@ -12891,7 +12436,7 @@
         </p:nvSpPr>
         <p:spPr>
           <a:xfrm>
-            <a:off x="3432053" y="3937323"/>
+            <a:off x="3430424" y="4174710"/>
             <a:ext cx="1665841" cy="217432"/>
           </a:xfrm>
           <a:prstGeom prst="rect">
@@ -14093,7 +13638,7 @@
         </p:nvSpPr>
         <p:spPr>
           <a:xfrm>
-            <a:off x="3328728" y="1403804"/>
+            <a:off x="3328728" y="785797"/>
             <a:ext cx="161420" cy="161420"/>
           </a:xfrm>
           <a:prstGeom prst="ellipse">
@@ -14147,7 +13692,7 @@
         </p:nvSpPr>
         <p:spPr>
           <a:xfrm>
-            <a:off x="3332211" y="2727369"/>
+            <a:off x="3327816" y="3062653"/>
             <a:ext cx="161420" cy="161420"/>
           </a:xfrm>
           <a:prstGeom prst="ellipse">
@@ -14182,7 +13727,7 @@
                   <a:schemeClr val="tx1"/>
                 </a:solidFill>
               </a:rPr>
-              <a:t>3</a:t>
+              <a:t>4</a:t>
             </a:r>
           </a:p>
         </p:txBody>
@@ -14201,7 +13746,7 @@
         </p:nvSpPr>
         <p:spPr>
           <a:xfrm>
-            <a:off x="3327598" y="3969212"/>
+            <a:off x="3325969" y="4206599"/>
             <a:ext cx="161420" cy="161420"/>
           </a:xfrm>
           <a:prstGeom prst="ellipse">
@@ -14236,7 +13781,7 @@
                   <a:schemeClr val="tx1"/>
                 </a:solidFill>
               </a:rPr>
-              <a:t>3</a:t>
+              <a:t>5</a:t>
             </a:r>
           </a:p>
         </p:txBody>
@@ -14255,7 +13800,7 @@
         </p:nvSpPr>
         <p:spPr>
           <a:xfrm>
-            <a:off x="3331558" y="4322593"/>
+            <a:off x="3320284" y="4585367"/>
             <a:ext cx="161420" cy="161420"/>
           </a:xfrm>
           <a:prstGeom prst="ellipse">
@@ -14417,7 +13962,7 @@
         </p:nvSpPr>
         <p:spPr>
           <a:xfrm>
-            <a:off x="57213" y="2671466"/>
+            <a:off x="57213" y="2239536"/>
             <a:ext cx="161420" cy="161420"/>
           </a:xfrm>
           <a:prstGeom prst="ellipse">
@@ -14452,7 +13997,7 @@
                   <a:schemeClr val="tx1"/>
                 </a:solidFill>
               </a:rPr>
-              <a:t>3</a:t>
+              <a:t>4</a:t>
             </a:r>
           </a:p>
         </p:txBody>
@@ -14719,6 +14264,447 @@
               <a:ea typeface="MesloLGSDZ Nerd Font" panose="020B0609030804020204" pitchFamily="49" charset="0"/>
               <a:cs typeface="MesloLGSDZ Nerd Font" panose="020B0609030804020204" pitchFamily="49" charset="0"/>
             </a:endParaRPr>
+          </a:p>
+        </p:txBody>
+      </p:sp>
+      <p:sp>
+        <p:nvSpPr>
+          <p:cNvPr id="2" name="Oval 1">
+            <a:extLst>
+              <a:ext uri="{FF2B5EF4-FFF2-40B4-BE49-F238E27FC236}">
+                <a16:creationId xmlns:a16="http://schemas.microsoft.com/office/drawing/2014/main" id="{5D12FA90-5654-D21B-0D4F-A8AABF3E6725}"/>
+              </a:ext>
+            </a:extLst>
+          </p:cNvPr>
+          <p:cNvSpPr/>
+          <p:nvPr/>
+        </p:nvSpPr>
+        <p:spPr>
+          <a:xfrm>
+            <a:off x="53266" y="869989"/>
+            <a:ext cx="161420" cy="161420"/>
+          </a:xfrm>
+          <a:prstGeom prst="ellipse">
+            <a:avLst/>
+          </a:prstGeom>
+          <a:noFill/>
+        </p:spPr>
+        <p:style>
+          <a:lnRef idx="2">
+            <a:schemeClr val="accent1">
+              <a:shade val="15000"/>
+            </a:schemeClr>
+          </a:lnRef>
+          <a:fillRef idx="1">
+            <a:schemeClr val="accent1"/>
+          </a:fillRef>
+          <a:effectRef idx="0">
+            <a:schemeClr val="accent1"/>
+          </a:effectRef>
+          <a:fontRef idx="minor">
+            <a:schemeClr val="lt1"/>
+          </a:fontRef>
+        </p:style>
+        <p:txBody>
+          <a:bodyPr rtlCol="0" anchor="ctr"/>
+          <a:lstStyle/>
+          <a:p>
+            <a:pPr algn="ctr"/>
+            <a:r>
+              <a:rPr lang="de-DE" sz="1000" dirty="0">
+                <a:solidFill>
+                  <a:schemeClr val="tx1"/>
+                </a:solidFill>
+              </a:rPr>
+              <a:t>3</a:t>
+            </a:r>
+          </a:p>
+        </p:txBody>
+      </p:sp>
+      <p:sp>
+        <p:nvSpPr>
+          <p:cNvPr id="3" name="Textfeld 2">
+            <a:extLst>
+              <a:ext uri="{FF2B5EF4-FFF2-40B4-BE49-F238E27FC236}">
+                <a16:creationId xmlns:a16="http://schemas.microsoft.com/office/drawing/2014/main" id="{70979638-D62B-CBB8-DA0E-9FA78E82A72D}"/>
+              </a:ext>
+            </a:extLst>
+          </p:cNvPr>
+          <p:cNvSpPr txBox="1"/>
+          <p:nvPr/>
+        </p:nvSpPr>
+        <p:spPr>
+          <a:xfrm>
+            <a:off x="184024" y="846836"/>
+            <a:ext cx="1454244" cy="217432"/>
+          </a:xfrm>
+          <a:prstGeom prst="rect">
+            <a:avLst/>
+          </a:prstGeom>
+          <a:noFill/>
+        </p:spPr>
+        <p:txBody>
+          <a:bodyPr wrap="none" rtlCol="0">
+            <a:spAutoFit/>
+          </a:bodyPr>
+          <a:lstStyle/>
+          <a:p>
+            <a:r>
+              <a:rPr lang="de-DE" sz="813" b="1" dirty="0"/>
+              <a:t>Ungültige Werte markieren</a:t>
+            </a:r>
+          </a:p>
+        </p:txBody>
+      </p:sp>
+      <p:sp>
+        <p:nvSpPr>
+          <p:cNvPr id="4" name="Textfeld 3">
+            <a:extLst>
+              <a:ext uri="{FF2B5EF4-FFF2-40B4-BE49-F238E27FC236}">
+                <a16:creationId xmlns:a16="http://schemas.microsoft.com/office/drawing/2014/main" id="{333EB553-67B6-C66D-4973-BE507E0C895C}"/>
+              </a:ext>
+            </a:extLst>
+          </p:cNvPr>
+          <p:cNvSpPr txBox="1"/>
+          <p:nvPr/>
+        </p:nvSpPr>
+        <p:spPr>
+          <a:xfrm>
+            <a:off x="186071" y="1206794"/>
+            <a:ext cx="2990750" cy="217432"/>
+          </a:xfrm>
+          <a:prstGeom prst="rect">
+            <a:avLst/>
+          </a:prstGeom>
+          <a:noFill/>
+        </p:spPr>
+        <p:txBody>
+          <a:bodyPr wrap="square">
+            <a:spAutoFit/>
+          </a:bodyPr>
+          <a:lstStyle/>
+          <a:p>
+            <a:r>
+              <a:rPr lang="de-DE" sz="813" dirty="0">
+                <a:solidFill>
+                  <a:schemeClr val="bg2">
+                    <a:lumMod val="50000"/>
+                  </a:schemeClr>
+                </a:solidFill>
+                <a:latin typeface="MesloLGSDZ Nerd Font" panose="020B0609030804020204" pitchFamily="49" charset="0"/>
+                <a:ea typeface="MesloLGSDZ Nerd Font" panose="020B0609030804020204" pitchFamily="49" charset="0"/>
+                <a:cs typeface="MesloLGSDZ Nerd Font" panose="020B0609030804020204" pitchFamily="49" charset="0"/>
+              </a:rPr>
+              <a:t>= UNGÜLTIGE.MARKIEREN(Werte, </a:t>
+            </a:r>
+            <a:r>
+              <a:rPr lang="de-DE" sz="813" dirty="0" err="1">
+                <a:solidFill>
+                  <a:schemeClr val="bg2">
+                    <a:lumMod val="50000"/>
+                  </a:schemeClr>
+                </a:solidFill>
+                <a:latin typeface="MesloLGSDZ Nerd Font" panose="020B0609030804020204" pitchFamily="49" charset="0"/>
+                <a:ea typeface="MesloLGSDZ Nerd Font" panose="020B0609030804020204" pitchFamily="49" charset="0"/>
+                <a:cs typeface="MesloLGSDZ Nerd Font" panose="020B0609030804020204" pitchFamily="49" charset="0"/>
+              </a:rPr>
+              <a:t>ungültige_werte</a:t>
+            </a:r>
+            <a:r>
+              <a:rPr lang="de-DE" sz="813" dirty="0">
+                <a:solidFill>
+                  <a:schemeClr val="bg2">
+                    <a:lumMod val="50000"/>
+                  </a:schemeClr>
+                </a:solidFill>
+                <a:latin typeface="MesloLGSDZ Nerd Font" panose="020B0609030804020204" pitchFamily="49" charset="0"/>
+                <a:ea typeface="MesloLGSDZ Nerd Font" panose="020B0609030804020204" pitchFamily="49" charset="0"/>
+                <a:cs typeface="MesloLGSDZ Nerd Font" panose="020B0609030804020204" pitchFamily="49" charset="0"/>
+              </a:rPr>
+              <a:t>)</a:t>
+            </a:r>
+          </a:p>
+        </p:txBody>
+      </p:sp>
+      <p:sp>
+        <p:nvSpPr>
+          <p:cNvPr id="5" name="Oval 4">
+            <a:extLst>
+              <a:ext uri="{FF2B5EF4-FFF2-40B4-BE49-F238E27FC236}">
+                <a16:creationId xmlns:a16="http://schemas.microsoft.com/office/drawing/2014/main" id="{A8A3F44D-5057-7A48-C69C-63001276F028}"/>
+              </a:ext>
+            </a:extLst>
+          </p:cNvPr>
+          <p:cNvSpPr/>
+          <p:nvPr/>
+        </p:nvSpPr>
+        <p:spPr>
+          <a:xfrm>
+            <a:off x="3323713" y="1830500"/>
+            <a:ext cx="161420" cy="161420"/>
+          </a:xfrm>
+          <a:prstGeom prst="ellipse">
+            <a:avLst/>
+          </a:prstGeom>
+          <a:noFill/>
+        </p:spPr>
+        <p:style>
+          <a:lnRef idx="2">
+            <a:schemeClr val="accent1">
+              <a:shade val="15000"/>
+            </a:schemeClr>
+          </a:lnRef>
+          <a:fillRef idx="1">
+            <a:schemeClr val="accent1"/>
+          </a:fillRef>
+          <a:effectRef idx="0">
+            <a:schemeClr val="accent1"/>
+          </a:effectRef>
+          <a:fontRef idx="minor">
+            <a:schemeClr val="lt1"/>
+          </a:fontRef>
+        </p:style>
+        <p:txBody>
+          <a:bodyPr rtlCol="0" anchor="ctr"/>
+          <a:lstStyle/>
+          <a:p>
+            <a:pPr algn="ctr"/>
+            <a:r>
+              <a:rPr lang="de-DE" sz="1000" dirty="0">
+                <a:solidFill>
+                  <a:schemeClr val="tx1"/>
+                </a:solidFill>
+              </a:rPr>
+              <a:t>3</a:t>
+            </a:r>
+          </a:p>
+        </p:txBody>
+      </p:sp>
+      <p:sp>
+        <p:nvSpPr>
+          <p:cNvPr id="6" name="Textfeld 5">
+            <a:extLst>
+              <a:ext uri="{FF2B5EF4-FFF2-40B4-BE49-F238E27FC236}">
+                <a16:creationId xmlns:a16="http://schemas.microsoft.com/office/drawing/2014/main" id="{8BCE3829-BCC3-01FF-12FA-BF9223107AC1}"/>
+              </a:ext>
+            </a:extLst>
+          </p:cNvPr>
+          <p:cNvSpPr txBox="1"/>
+          <p:nvPr/>
+        </p:nvSpPr>
+        <p:spPr>
+          <a:xfrm>
+            <a:off x="3432759" y="762150"/>
+            <a:ext cx="2111475" cy="217432"/>
+          </a:xfrm>
+          <a:prstGeom prst="rect">
+            <a:avLst/>
+          </a:prstGeom>
+          <a:noFill/>
+        </p:spPr>
+        <p:txBody>
+          <a:bodyPr wrap="none" rtlCol="0">
+            <a:spAutoFit/>
+          </a:bodyPr>
+          <a:lstStyle/>
+          <a:p>
+            <a:r>
+              <a:rPr lang="de-DE" sz="813" b="1" dirty="0"/>
+              <a:t>Optional: Daten in die Langform bringen</a:t>
+            </a:r>
+          </a:p>
+        </p:txBody>
+      </p:sp>
+      <p:sp>
+        <p:nvSpPr>
+          <p:cNvPr id="7" name="Textfeld 6">
+            <a:extLst>
+              <a:ext uri="{FF2B5EF4-FFF2-40B4-BE49-F238E27FC236}">
+                <a16:creationId xmlns:a16="http://schemas.microsoft.com/office/drawing/2014/main" id="{44A7B00E-8039-C676-815F-C2343E706F49}"/>
+              </a:ext>
+            </a:extLst>
+          </p:cNvPr>
+          <p:cNvSpPr txBox="1"/>
+          <p:nvPr/>
+        </p:nvSpPr>
+        <p:spPr>
+          <a:xfrm>
+            <a:off x="3432053" y="939242"/>
+            <a:ext cx="2719346" cy="467629"/>
+          </a:xfrm>
+          <a:prstGeom prst="rect">
+            <a:avLst/>
+          </a:prstGeom>
+          <a:noFill/>
+        </p:spPr>
+        <p:txBody>
+          <a:bodyPr wrap="square">
+            <a:spAutoFit/>
+          </a:bodyPr>
+          <a:lstStyle/>
+          <a:p>
+            <a:r>
+              <a:rPr lang="de-DE" sz="813" dirty="0">
+                <a:latin typeface="MesloLGSDZ Nerd Font" panose="020B0609030804020204" pitchFamily="49" charset="0"/>
+                <a:ea typeface="MesloLGSDZ Nerd Font" panose="020B0609030804020204" pitchFamily="49" charset="0"/>
+                <a:cs typeface="MesloLGSDZ Nerd Font" panose="020B0609030804020204" pitchFamily="49" charset="0"/>
+              </a:rPr>
+              <a:t>= MATRIX.ZU.LANGFORM(</a:t>
+            </a:r>
+            <a:r>
+              <a:rPr lang="de-DE" sz="813" dirty="0" err="1">
+                <a:latin typeface="MesloLGSDZ Nerd Font" panose="020B0609030804020204" pitchFamily="49" charset="0"/>
+                <a:ea typeface="MesloLGSDZ Nerd Font" panose="020B0609030804020204" pitchFamily="49" charset="0"/>
+                <a:cs typeface="MesloLGSDZ Nerd Font" panose="020B0609030804020204" pitchFamily="49" charset="0"/>
+              </a:rPr>
+              <a:t>extrahierte_werte</a:t>
+            </a:r>
+            <a:r>
+              <a:rPr lang="de-DE" sz="813" dirty="0">
+                <a:latin typeface="MesloLGSDZ Nerd Font" panose="020B0609030804020204" pitchFamily="49" charset="0"/>
+                <a:ea typeface="MesloLGSDZ Nerd Font" panose="020B0609030804020204" pitchFamily="49" charset="0"/>
+                <a:cs typeface="MesloLGSDZ Nerd Font" panose="020B0609030804020204" pitchFamily="49" charset="0"/>
+              </a:rPr>
+              <a:t>;</a:t>
+            </a:r>
+          </a:p>
+          <a:p>
+            <a:r>
+              <a:rPr lang="de-DE" sz="813" dirty="0">
+                <a:latin typeface="MesloLGSDZ Nerd Font" panose="020B0609030804020204" pitchFamily="49" charset="0"/>
+                <a:ea typeface="MesloLGSDZ Nerd Font" panose="020B0609030804020204" pitchFamily="49" charset="0"/>
+                <a:cs typeface="MesloLGSDZ Nerd Font" panose="020B0609030804020204" pitchFamily="49" charset="0"/>
+              </a:rPr>
+              <a:t>                     </a:t>
+            </a:r>
+            <a:r>
+              <a:rPr lang="de-DE" sz="813" dirty="0" err="1">
+                <a:latin typeface="MesloLGSDZ Nerd Font" panose="020B0609030804020204" pitchFamily="49" charset="0"/>
+                <a:ea typeface="MesloLGSDZ Nerd Font" panose="020B0609030804020204" pitchFamily="49" charset="0"/>
+                <a:cs typeface="MesloLGSDZ Nerd Font" panose="020B0609030804020204" pitchFamily="49" charset="0"/>
+              </a:rPr>
+              <a:t>alte_vektornamen</a:t>
+            </a:r>
+            <a:r>
+              <a:rPr lang="de-DE" sz="813" dirty="0">
+                <a:latin typeface="MesloLGSDZ Nerd Font" panose="020B0609030804020204" pitchFamily="49" charset="0"/>
+                <a:ea typeface="MesloLGSDZ Nerd Font" panose="020B0609030804020204" pitchFamily="49" charset="0"/>
+                <a:cs typeface="MesloLGSDZ Nerd Font" panose="020B0609030804020204" pitchFamily="49" charset="0"/>
+              </a:rPr>
+              <a:t>; </a:t>
+            </a:r>
+          </a:p>
+          <a:p>
+            <a:r>
+              <a:rPr lang="de-DE" sz="813" dirty="0">
+                <a:latin typeface="MesloLGSDZ Nerd Font" panose="020B0609030804020204" pitchFamily="49" charset="0"/>
+                <a:ea typeface="MesloLGSDZ Nerd Font" panose="020B0609030804020204" pitchFamily="49" charset="0"/>
+                <a:cs typeface="MesloLGSDZ Nerd Font" panose="020B0609030804020204" pitchFamily="49" charset="0"/>
+              </a:rPr>
+              <a:t>                     </a:t>
+            </a:r>
+            <a:r>
+              <a:rPr lang="de-DE" sz="813" dirty="0" err="1">
+                <a:latin typeface="MesloLGSDZ Nerd Font" panose="020B0609030804020204" pitchFamily="49" charset="0"/>
+                <a:ea typeface="MesloLGSDZ Nerd Font" panose="020B0609030804020204" pitchFamily="49" charset="0"/>
+                <a:cs typeface="MesloLGSDZ Nerd Font" panose="020B0609030804020204" pitchFamily="49" charset="0"/>
+              </a:rPr>
+              <a:t>mit_überschriften</a:t>
+            </a:r>
+            <a:r>
+              <a:rPr lang="de-DE" sz="813" dirty="0">
+                <a:latin typeface="MesloLGSDZ Nerd Font" panose="020B0609030804020204" pitchFamily="49" charset="0"/>
+                <a:ea typeface="MesloLGSDZ Nerd Font" panose="020B0609030804020204" pitchFamily="49" charset="0"/>
+                <a:cs typeface="MesloLGSDZ Nerd Font" panose="020B0609030804020204" pitchFamily="49" charset="0"/>
+              </a:rPr>
+              <a:t>)</a:t>
+            </a:r>
+          </a:p>
+        </p:txBody>
+      </p:sp>
+      <p:sp>
+        <p:nvSpPr>
+          <p:cNvPr id="9" name="Textfeld 8">
+            <a:extLst>
+              <a:ext uri="{FF2B5EF4-FFF2-40B4-BE49-F238E27FC236}">
+                <a16:creationId xmlns:a16="http://schemas.microsoft.com/office/drawing/2014/main" id="{54ADBEFC-A643-C0AE-18C1-A35210788F02}"/>
+              </a:ext>
+            </a:extLst>
+          </p:cNvPr>
+          <p:cNvSpPr txBox="1"/>
+          <p:nvPr/>
+        </p:nvSpPr>
+        <p:spPr>
+          <a:xfrm>
+            <a:off x="3455087" y="1332918"/>
+            <a:ext cx="564578" cy="217432"/>
+          </a:xfrm>
+          <a:prstGeom prst="rect">
+            <a:avLst/>
+          </a:prstGeom>
+          <a:noFill/>
+        </p:spPr>
+        <p:txBody>
+          <a:bodyPr wrap="none" rtlCol="0">
+            <a:spAutoFit/>
+          </a:bodyPr>
+          <a:lstStyle/>
+          <a:p>
+            <a:pPr algn="ctr"/>
+            <a:r>
+              <a:rPr lang="de-DE" sz="813" b="1" dirty="0">
+                <a:solidFill>
+                  <a:schemeClr val="bg2">
+                    <a:lumMod val="50000"/>
+                  </a:schemeClr>
+                </a:solidFill>
+              </a:rPr>
+              <a:t>Beispiel</a:t>
+            </a:r>
+          </a:p>
+        </p:txBody>
+      </p:sp>
+      <p:sp>
+        <p:nvSpPr>
+          <p:cNvPr id="14" name="Textfeld 13">
+            <a:extLst>
+              <a:ext uri="{FF2B5EF4-FFF2-40B4-BE49-F238E27FC236}">
+                <a16:creationId xmlns:a16="http://schemas.microsoft.com/office/drawing/2014/main" id="{985B9DE3-406D-F675-6962-3082579FC046}"/>
+              </a:ext>
+            </a:extLst>
+          </p:cNvPr>
+          <p:cNvSpPr txBox="1"/>
+          <p:nvPr/>
+        </p:nvSpPr>
+        <p:spPr>
+          <a:xfrm>
+            <a:off x="3622163" y="1508031"/>
+            <a:ext cx="3010842" cy="217432"/>
+          </a:xfrm>
+          <a:prstGeom prst="rect">
+            <a:avLst/>
+          </a:prstGeom>
+          <a:noFill/>
+        </p:spPr>
+        <p:txBody>
+          <a:bodyPr wrap="square">
+            <a:spAutoFit/>
+          </a:bodyPr>
+          <a:lstStyle/>
+          <a:p>
+            <a:r>
+              <a:rPr lang="de-DE" sz="813" dirty="0">
+                <a:solidFill>
+                  <a:schemeClr val="bg2">
+                    <a:lumMod val="50000"/>
+                  </a:schemeClr>
+                </a:solidFill>
+                <a:latin typeface="MesloLGSDZ Nerd Font" panose="020B0609030804020204" pitchFamily="49" charset="0"/>
+                <a:ea typeface="MesloLGSDZ Nerd Font" panose="020B0609030804020204" pitchFamily="49" charset="0"/>
+                <a:cs typeface="MesloLGSDZ Nerd Font" panose="020B0609030804020204" pitchFamily="49" charset="0"/>
+              </a:rPr>
+              <a:t>= MATRIX.ZU.LANGFORM(a2#:b2#; a1:b1; FALSCH)</a:t>
+            </a:r>
           </a:p>
         </p:txBody>
       </p:sp>

--- a/cheat_sheet_DE.pptx
+++ b/cheat_sheet_DE.pptx
@@ -13835,7 +13835,7 @@
                   <a:schemeClr val="tx1"/>
                 </a:solidFill>
               </a:rPr>
-              <a:t>4</a:t>
+              <a:t>6</a:t>
             </a:r>
           </a:p>
         </p:txBody>
@@ -14336,7 +14336,7 @@
         <p:spPr>
           <a:xfrm>
             <a:off x="184024" y="846836"/>
-            <a:ext cx="1454244" cy="217432"/>
+            <a:ext cx="2297424" cy="217432"/>
           </a:xfrm>
           <a:prstGeom prst="rect">
             <a:avLst/>
@@ -14351,7 +14351,7 @@
           <a:p>
             <a:r>
               <a:rPr lang="de-DE" sz="813" b="1" dirty="0"/>
-              <a:t>Ungültige Werte markieren</a:t>
+              <a:t>Ungültige Werte markieren (nicht entfernen!)</a:t>
             </a:r>
           </a:p>
         </p:txBody>
